--- a/presentation.pptx
+++ b/presentation.pptx
@@ -1,30 +1,127 @@
 
 <file path=ppt/presentation.xml><?xml version="1.0" encoding="utf-8"?>
-<p:presentation xmlns:r="http://schemas.openxmlformats.org/officeDocument/2006/relationships" xmlns:p="http://schemas.openxmlformats.org/presentationml/2006/main">
+<p:presentation xmlns:a="http://schemas.openxmlformats.org/drawingml/2006/main" xmlns:r="http://schemas.openxmlformats.org/officeDocument/2006/relationships" xmlns:p="http://schemas.openxmlformats.org/presentationml/2006/main">
   <p:sldMasterIdLst>
-    <p:sldMasterId xmlns:r="http://schemas.openxmlformats.org/officeDocument/2006/relationships" id="2147483648" r:id="rId1"/>
+    <p:sldMasterId id="2147483648" r:id="rId1"/>
   </p:sldMasterIdLst>
   <p:notesMasterIdLst>
-    <p:notesMasterId r:id="R1adc1df8bf1f4b7d"/>
+    <p:notesMasterId r:id="rId4"/>
   </p:notesMasterIdLst>
   <p:sldIdLst>
-    <p:sldId id="256" r:id="R7843356fc3e3460c"/>
-    <p:sldId id="257" r:id="R6491148b360b4654"/>
-    <p:sldId id="258" r:id="Ra7e5353071bd4006"/>
-    <p:sldId id="259" r:id="R18ec383c44fe4c93"/>
-    <p:sldId id="260" r:id="R15859766f36342de"/>
-    <p:sldId id="261" r:id="R1fe5a86144b6477b"/>
-    <p:sldId id="262" r:id="Rdad93efe4a124479"/>
-    <p:sldId id="263" r:id="Re42a4534b5a34e79"/>
+    <p:sldId id="256" r:id="rId3"/>
+    <p:sldId id="257" r:id="rId5"/>
+    <p:sldId id="258" r:id="rId6"/>
+    <p:sldId id="259" r:id="rId7"/>
+    <p:sldId id="260" r:id="rId8"/>
+    <p:sldId id="261" r:id="rId9"/>
+    <p:sldId id="262" r:id="rId10"/>
+    <p:sldId id="263" r:id="rId11"/>
   </p:sldIdLst>
   <p:sldSz cx="12192000" cy="6858000"/>
   <p:notesSz cx="6858000" cy="9144000"/>
+  <p:defaultTextStyle>
+    <a:lvl1pPr marL="0" algn="l" defTabSz="914400" rtl="0" eaLnBrk="1" latinLnBrk="0" hangingPunct="1">
+      <a:defRPr sz="1800" kern="1200">
+        <a:solidFill>
+          <a:schemeClr val="tx1"/>
+        </a:solidFill>
+        <a:latin typeface="+mn-lt"/>
+        <a:ea typeface="+mn-ea"/>
+        <a:cs typeface="+mn-cs"/>
+      </a:defRPr>
+    </a:lvl1pPr>
+    <a:lvl2pPr marL="457200" algn="l" defTabSz="914400" rtl="0" eaLnBrk="1" latinLnBrk="0" hangingPunct="1">
+      <a:defRPr sz="1800" kern="1200">
+        <a:solidFill>
+          <a:schemeClr val="tx1"/>
+        </a:solidFill>
+        <a:latin typeface="+mn-lt"/>
+        <a:ea typeface="+mn-ea"/>
+        <a:cs typeface="+mn-cs"/>
+      </a:defRPr>
+    </a:lvl2pPr>
+    <a:lvl3pPr marL="914400" algn="l" defTabSz="914400" rtl="0" eaLnBrk="1" latinLnBrk="0" hangingPunct="1">
+      <a:defRPr sz="1800" kern="1200">
+        <a:solidFill>
+          <a:schemeClr val="tx1"/>
+        </a:solidFill>
+        <a:latin typeface="+mn-lt"/>
+        <a:ea typeface="+mn-ea"/>
+        <a:cs typeface="+mn-cs"/>
+      </a:defRPr>
+    </a:lvl3pPr>
+    <a:lvl4pPr marL="1371600" algn="l" defTabSz="914400" rtl="0" eaLnBrk="1" latinLnBrk="0" hangingPunct="1">
+      <a:defRPr sz="1800" kern="1200">
+        <a:solidFill>
+          <a:schemeClr val="tx1"/>
+        </a:solidFill>
+        <a:latin typeface="+mn-lt"/>
+        <a:ea typeface="+mn-ea"/>
+        <a:cs typeface="+mn-cs"/>
+      </a:defRPr>
+    </a:lvl4pPr>
+    <a:lvl5pPr marL="1828800" algn="l" defTabSz="914400" rtl="0" eaLnBrk="1" latinLnBrk="0" hangingPunct="1">
+      <a:defRPr sz="1800" kern="1200">
+        <a:solidFill>
+          <a:schemeClr val="tx1"/>
+        </a:solidFill>
+        <a:latin typeface="+mn-lt"/>
+        <a:ea typeface="+mn-ea"/>
+        <a:cs typeface="+mn-cs"/>
+      </a:defRPr>
+    </a:lvl5pPr>
+    <a:lvl6pPr marL="2286000" algn="l" defTabSz="914400" rtl="0" eaLnBrk="1" latinLnBrk="0" hangingPunct="1">
+      <a:defRPr sz="1800" kern="1200">
+        <a:solidFill>
+          <a:schemeClr val="tx1"/>
+        </a:solidFill>
+        <a:latin typeface="+mn-lt"/>
+        <a:ea typeface="+mn-ea"/>
+        <a:cs typeface="+mn-cs"/>
+      </a:defRPr>
+    </a:lvl6pPr>
+    <a:lvl7pPr marL="2743200" algn="l" defTabSz="914400" rtl="0" eaLnBrk="1" latinLnBrk="0" hangingPunct="1">
+      <a:defRPr sz="1800" kern="1200">
+        <a:solidFill>
+          <a:schemeClr val="tx1"/>
+        </a:solidFill>
+        <a:latin typeface="+mn-lt"/>
+        <a:ea typeface="+mn-ea"/>
+        <a:cs typeface="+mn-cs"/>
+      </a:defRPr>
+    </a:lvl7pPr>
+    <a:lvl8pPr marL="3200400" algn="l" defTabSz="914400" rtl="0" eaLnBrk="1" latinLnBrk="0" hangingPunct="1">
+      <a:defRPr sz="1800" kern="1200">
+        <a:solidFill>
+          <a:schemeClr val="tx1"/>
+        </a:solidFill>
+        <a:latin typeface="+mn-lt"/>
+        <a:ea typeface="+mn-ea"/>
+        <a:cs typeface="+mn-cs"/>
+      </a:defRPr>
+    </a:lvl8pPr>
+    <a:lvl9pPr marL="3657600" algn="l" defTabSz="914400" rtl="0" eaLnBrk="1" latinLnBrk="0" hangingPunct="1">
+      <a:defRPr sz="1800" kern="1200">
+        <a:solidFill>
+          <a:schemeClr val="tx1"/>
+        </a:solidFill>
+        <a:latin typeface="+mn-lt"/>
+        <a:ea typeface="+mn-ea"/>
+        <a:cs typeface="+mn-cs"/>
+      </a:defRPr>
+    </a:lvl9pPr>
+  </p:defaultTextStyle>
 </p:presentation>
 </file>
 
 <file path=ppt/notesMasters/notesMaster1.xml><?xml version="1.0" encoding="utf-8"?>
 <p:notesMaster xmlns:a="http://schemas.openxmlformats.org/drawingml/2006/main" xmlns:r="http://schemas.openxmlformats.org/officeDocument/2006/relationships" xmlns:p="http://schemas.openxmlformats.org/presentationml/2006/main">
   <p:cSld>
+    <p:bg>
+      <p:bgRef idx="1001">
+        <a:schemeClr val="bg1"/>
+      </p:bgRef>
+    </p:bg>
     <p:spTree>
       <p:nvGrpSpPr>
         <p:cNvPr id="1" name=""/>
@@ -327,117 +424,8 @@
 </p:notesMaster>
 </file>
 
-<file path=ppt/notesMasters/theme/theme2.xml><?xml version="1.0" encoding="utf-8"?>
-<a:theme xmlns:a="http://schemas.openxmlformats.org/drawingml/2006/main" name="Office Theme">
-  <a:themeElements>
-    <a:clrScheme name="Office">
-      <a:dk1>
-        <a:sysClr val="windowText" lastClr="000000"/>
-      </a:dk1>
-      <a:lt1>
-        <a:sysClr val="window" lastClr="FFFFFF"/>
-      </a:lt1>
-      <a:dk2>
-        <a:srgbClr val="44546A"/>
-      </a:dk2>
-      <a:lt2>
-        <a:srgbClr val="E7E6E6"/>
-      </a:lt2>
-      <a:accent1>
-        <a:srgbClr val="4472C4"/>
-      </a:accent1>
-      <a:accent2>
-        <a:srgbClr val="ED7D31"/>
-      </a:accent2>
-      <a:accent3>
-        <a:srgbClr val="A5A5A5"/>
-      </a:accent3>
-      <a:accent4>
-        <a:srgbClr val="FFC000"/>
-      </a:accent4>
-      <a:accent5>
-        <a:srgbClr val="5B9BD5"/>
-      </a:accent5>
-      <a:accent6>
-        <a:srgbClr val="70AD47"/>
-      </a:accent6>
-      <a:hlink>
-        <a:srgbClr val="0563C1"/>
-      </a:hlink>
-      <a:folHlink>
-        <a:srgbClr val="954F72"/>
-      </a:folHlink>
-    </a:clrScheme>
-    <a:fontScheme name="Office">
-      <a:majorFont>
-        <a:latin typeface="Calibri Light"/>
-        <a:ea typeface=""/>
-        <a:cs typeface=""/>
-      </a:majorFont>
-      <a:minorFont>
-        <a:latin typeface="Calibri"/>
-        <a:ea typeface=""/>
-        <a:cs typeface=""/>
-      </a:minorFont>
-    </a:fontScheme>
-    <a:fmtScheme name="Office">
-      <a:fillStyleLst>
-        <a:solidFill>
-          <a:schemeClr val="phClr"/>
-        </a:solidFill>
-        <a:solidFill>
-          <a:schemeClr val="phClr"/>
-        </a:solidFill>
-        <a:solidFill>
-          <a:schemeClr val="phClr"/>
-        </a:solidFill>
-      </a:fillStyleLst>
-      <a:lnStyleLst>
-        <a:ln w="6350" cap="flat">
-          <a:solidFill>
-            <a:schemeClr val="phClr"/>
-          </a:solidFill>
-        </a:ln>
-        <a:ln w="12700" cap="flat">
-          <a:solidFill>
-            <a:schemeClr val="phClr"/>
-          </a:solidFill>
-        </a:ln>
-        <a:ln w="19050" cap="flat">
-          <a:solidFill>
-            <a:schemeClr val="phClr"/>
-          </a:solidFill>
-        </a:ln>
-      </a:lnStyleLst>
-      <a:effectStyleLst>
-        <a:effectStyle>
-          <a:effectLst/>
-        </a:effectStyle>
-        <a:effectStyle>
-          <a:effectLst/>
-        </a:effectStyle>
-        <a:effectStyle>
-          <a:effectLst/>
-        </a:effectStyle>
-      </a:effectStyleLst>
-      <a:bgFillStyleLst>
-        <a:solidFill>
-          <a:schemeClr val="phClr"/>
-        </a:solidFill>
-        <a:solidFill>
-          <a:schemeClr val="phClr"/>
-        </a:solidFill>
-        <a:solidFill>
-          <a:schemeClr val="phClr"/>
-        </a:solidFill>
-      </a:bgFillStyleLst>
-    </a:fmtScheme>
-  </a:themeElements>
-</a:theme>
-</file>
-
 <file path=ppt/notesSlides/notesSlide1.xml><?xml version="1.0" encoding="utf-8"?>
-<p:notes xmlns:p="http://schemas.openxmlformats.org/presentationml/2006/main">
+<p:notes xmlns:a="http://schemas.openxmlformats.org/drawingml/2006/main" xmlns:r="http://schemas.openxmlformats.org/officeDocument/2006/relationships" xmlns:p="http://schemas.openxmlformats.org/presentationml/2006/main">
   <p:cSld>
     <p:spTree>
       <p:nvGrpSpPr>
@@ -445,22 +433,20 @@
         <p:cNvGrpSpPr/>
         <p:nvPr/>
       </p:nvGrpSpPr>
-      <p:grpSpPr>
-        <a:xfrm xmlns:a="http://schemas.openxmlformats.org/drawingml/2006/main"/>
-      </p:grpSpPr>
+      <p:grpSpPr/>
       <p:sp>
         <p:nvSpPr>
           <p:cNvPr id="2" name="Slide Image Placeholder 1"/>
           <p:cNvSpPr/>
           <p:nvPr>
-            <p:ph type="sldImg" idx="0"/>
+            <p:ph type="sldImg"/>
           </p:nvPr>
         </p:nvSpPr>
         <p:spPr/>
         <p:txBody>
-          <a:bodyPr xmlns:a="http://schemas.openxmlformats.org/drawingml/2006/main"/>
-          <a:lstStyle xmlns:a="http://schemas.openxmlformats.org/drawingml/2006/main"/>
-          <a:p xmlns:a="http://schemas.openxmlformats.org/drawingml/2006/main"/>
+          <a:bodyPr/>
+          <a:lstStyle/>
+          <a:p/>
         </p:txBody>
       </p:sp>
       <p:sp>
@@ -473,26 +459,27 @@
         </p:nvSpPr>
         <p:spPr/>
         <p:txBody>
-          <a:bodyPr xmlns:a="http://schemas.openxmlformats.org/drawingml/2006/main"/>
-          <a:lstStyle xmlns:a="http://schemas.openxmlformats.org/drawingml/2006/main"/>
-          <a:p xmlns:a="http://schemas.openxmlformats.org/drawingml/2006/main">
+          <a:bodyPr/>
+          <a:lstStyle/>
+          <a:p>
             <a:r>
               <a:rPr lang="zh-CN"/>
               <a:t>用项目句子开场，明确不做什么。</a:t>
             </a:r>
+            <a:endParaRPr lang="zh-CN"/>
           </a:p>
         </p:txBody>
       </p:sp>
     </p:spTree>
   </p:cSld>
   <p:clrMapOvr>
-    <a:masterClrMapping xmlns:a="http://schemas.openxmlformats.org/drawingml/2006/main"/>
+    <a:masterClrMapping/>
   </p:clrMapOvr>
 </p:notes>
 </file>
 
 <file path=ppt/notesSlides/notesSlide2.xml><?xml version="1.0" encoding="utf-8"?>
-<p:notes xmlns:p="http://schemas.openxmlformats.org/presentationml/2006/main">
+<p:notes xmlns:a="http://schemas.openxmlformats.org/drawingml/2006/main" xmlns:r="http://schemas.openxmlformats.org/officeDocument/2006/relationships" xmlns:p="http://schemas.openxmlformats.org/presentationml/2006/main">
   <p:cSld>
     <p:spTree>
       <p:nvGrpSpPr>
@@ -500,22 +487,20 @@
         <p:cNvGrpSpPr/>
         <p:nvPr/>
       </p:nvGrpSpPr>
-      <p:grpSpPr>
-        <a:xfrm xmlns:a="http://schemas.openxmlformats.org/drawingml/2006/main"/>
-      </p:grpSpPr>
+      <p:grpSpPr/>
       <p:sp>
         <p:nvSpPr>
           <p:cNvPr id="2" name="Slide Image Placeholder 1"/>
           <p:cNvSpPr/>
           <p:nvPr>
-            <p:ph type="sldImg" idx="0"/>
+            <p:ph type="sldImg"/>
           </p:nvPr>
         </p:nvSpPr>
         <p:spPr/>
         <p:txBody>
-          <a:bodyPr xmlns:a="http://schemas.openxmlformats.org/drawingml/2006/main"/>
-          <a:lstStyle xmlns:a="http://schemas.openxmlformats.org/drawingml/2006/main"/>
-          <a:p xmlns:a="http://schemas.openxmlformats.org/drawingml/2006/main"/>
+          <a:bodyPr/>
+          <a:lstStyle/>
+          <a:p/>
         </p:txBody>
       </p:sp>
       <p:sp>
@@ -528,26 +513,27 @@
         </p:nvSpPr>
         <p:spPr/>
         <p:txBody>
-          <a:bodyPr xmlns:a="http://schemas.openxmlformats.org/drawingml/2006/main"/>
-          <a:lstStyle xmlns:a="http://schemas.openxmlformats.org/drawingml/2006/main"/>
-          <a:p xmlns:a="http://schemas.openxmlformats.org/drawingml/2006/main">
+          <a:bodyPr/>
+          <a:lstStyle/>
+          <a:p>
             <a:r>
               <a:rPr lang="zh-CN"/>
               <a:t>说明数据如何获得、检查证明什么，以及原始数据为何不进 Git。</a:t>
             </a:r>
+            <a:endParaRPr lang="zh-CN"/>
           </a:p>
         </p:txBody>
       </p:sp>
     </p:spTree>
   </p:cSld>
   <p:clrMapOvr>
-    <a:masterClrMapping xmlns:a="http://schemas.openxmlformats.org/drawingml/2006/main"/>
+    <a:masterClrMapping/>
   </p:clrMapOvr>
 </p:notes>
 </file>
 
 <file path=ppt/notesSlides/notesSlide3.xml><?xml version="1.0" encoding="utf-8"?>
-<p:notes xmlns:p="http://schemas.openxmlformats.org/presentationml/2006/main">
+<p:notes xmlns:a="http://schemas.openxmlformats.org/drawingml/2006/main" xmlns:r="http://schemas.openxmlformats.org/officeDocument/2006/relationships" xmlns:p="http://schemas.openxmlformats.org/presentationml/2006/main">
   <p:cSld>
     <p:spTree>
       <p:nvGrpSpPr>
@@ -555,22 +541,20 @@
         <p:cNvGrpSpPr/>
         <p:nvPr/>
       </p:nvGrpSpPr>
-      <p:grpSpPr>
-        <a:xfrm xmlns:a="http://schemas.openxmlformats.org/drawingml/2006/main"/>
-      </p:grpSpPr>
+      <p:grpSpPr/>
       <p:sp>
         <p:nvSpPr>
           <p:cNvPr id="2" name="Slide Image Placeholder 1"/>
           <p:cNvSpPr/>
           <p:nvPr>
-            <p:ph type="sldImg" idx="0"/>
+            <p:ph type="sldImg"/>
           </p:nvPr>
         </p:nvSpPr>
         <p:spPr/>
         <p:txBody>
-          <a:bodyPr xmlns:a="http://schemas.openxmlformats.org/drawingml/2006/main"/>
-          <a:lstStyle xmlns:a="http://schemas.openxmlformats.org/drawingml/2006/main"/>
-          <a:p xmlns:a="http://schemas.openxmlformats.org/drawingml/2006/main"/>
+          <a:bodyPr/>
+          <a:lstStyle/>
+          <a:p/>
         </p:txBody>
       </p:sp>
       <p:sp>
@@ -583,26 +567,27 @@
         </p:nvSpPr>
         <p:spPr/>
         <p:txBody>
-          <a:bodyPr xmlns:a="http://schemas.openxmlformats.org/drawingml/2006/main"/>
-          <a:lstStyle xmlns:a="http://schemas.openxmlformats.org/drawingml/2006/main"/>
-          <a:p xmlns:a="http://schemas.openxmlformats.org/drawingml/2006/main">
+          <a:bodyPr/>
+          <a:lstStyle/>
+          <a:p>
             <a:r>
               <a:rPr lang="zh-CN"/>
               <a:t>从一条真实输入追踪到结果，删除不必要组件。</a:t>
             </a:r>
+            <a:endParaRPr lang="zh-CN"/>
           </a:p>
         </p:txBody>
       </p:sp>
     </p:spTree>
   </p:cSld>
   <p:clrMapOvr>
-    <a:masterClrMapping xmlns:a="http://schemas.openxmlformats.org/drawingml/2006/main"/>
+    <a:masterClrMapping/>
   </p:clrMapOvr>
 </p:notes>
 </file>
 
 <file path=ppt/notesSlides/notesSlide4.xml><?xml version="1.0" encoding="utf-8"?>
-<p:notes xmlns:p="http://schemas.openxmlformats.org/presentationml/2006/main">
+<p:notes xmlns:a="http://schemas.openxmlformats.org/drawingml/2006/main" xmlns:r="http://schemas.openxmlformats.org/officeDocument/2006/relationships" xmlns:p="http://schemas.openxmlformats.org/presentationml/2006/main">
   <p:cSld>
     <p:spTree>
       <p:nvGrpSpPr>
@@ -610,22 +595,20 @@
         <p:cNvGrpSpPr/>
         <p:nvPr/>
       </p:nvGrpSpPr>
-      <p:grpSpPr>
-        <a:xfrm xmlns:a="http://schemas.openxmlformats.org/drawingml/2006/main"/>
-      </p:grpSpPr>
+      <p:grpSpPr/>
       <p:sp>
         <p:nvSpPr>
           <p:cNvPr id="2" name="Slide Image Placeholder 1"/>
           <p:cNvSpPr/>
           <p:nvPr>
-            <p:ph type="sldImg" idx="0"/>
+            <p:ph type="sldImg"/>
           </p:nvPr>
         </p:nvSpPr>
         <p:spPr/>
         <p:txBody>
-          <a:bodyPr xmlns:a="http://schemas.openxmlformats.org/drawingml/2006/main"/>
-          <a:lstStyle xmlns:a="http://schemas.openxmlformats.org/drawingml/2006/main"/>
-          <a:p xmlns:a="http://schemas.openxmlformats.org/drawingml/2006/main"/>
+          <a:bodyPr/>
+          <a:lstStyle/>
+          <a:p/>
         </p:txBody>
       </p:sp>
       <p:sp>
@@ -638,26 +621,27 @@
         </p:nvSpPr>
         <p:spPr/>
         <p:txBody>
-          <a:bodyPr xmlns:a="http://schemas.openxmlformats.org/drawingml/2006/main"/>
-          <a:lstStyle xmlns:a="http://schemas.openxmlformats.org/drawingml/2006/main"/>
-          <a:p xmlns:a="http://schemas.openxmlformats.org/drawingml/2006/main">
+          <a:bodyPr/>
+          <a:lstStyle/>
+          <a:p>
             <a:r>
               <a:rPr lang="zh-CN"/>
               <a:t>解释保持相同的数据、划分、指标和运行条件。</a:t>
             </a:r>
+            <a:endParaRPr lang="zh-CN"/>
           </a:p>
         </p:txBody>
       </p:sp>
     </p:spTree>
   </p:cSld>
   <p:clrMapOvr>
-    <a:masterClrMapping xmlns:a="http://schemas.openxmlformats.org/drawingml/2006/main"/>
+    <a:masterClrMapping/>
   </p:clrMapOvr>
 </p:notes>
 </file>
 
 <file path=ppt/notesSlides/notesSlide5.xml><?xml version="1.0" encoding="utf-8"?>
-<p:notes xmlns:p="http://schemas.openxmlformats.org/presentationml/2006/main">
+<p:notes xmlns:a="http://schemas.openxmlformats.org/drawingml/2006/main" xmlns:r="http://schemas.openxmlformats.org/officeDocument/2006/relationships" xmlns:p="http://schemas.openxmlformats.org/presentationml/2006/main">
   <p:cSld>
     <p:spTree>
       <p:nvGrpSpPr>
@@ -665,22 +649,20 @@
         <p:cNvGrpSpPr/>
         <p:nvPr/>
       </p:nvGrpSpPr>
-      <p:grpSpPr>
-        <a:xfrm xmlns:a="http://schemas.openxmlformats.org/drawingml/2006/main"/>
-      </p:grpSpPr>
+      <p:grpSpPr/>
       <p:sp>
         <p:nvSpPr>
           <p:cNvPr id="2" name="Slide Image Placeholder 1"/>
           <p:cNvSpPr/>
           <p:nvPr>
-            <p:ph type="sldImg" idx="0"/>
+            <p:ph type="sldImg"/>
           </p:nvPr>
         </p:nvSpPr>
         <p:spPr/>
         <p:txBody>
-          <a:bodyPr xmlns:a="http://schemas.openxmlformats.org/drawingml/2006/main"/>
-          <a:lstStyle xmlns:a="http://schemas.openxmlformats.org/drawingml/2006/main"/>
-          <a:p xmlns:a="http://schemas.openxmlformats.org/drawingml/2006/main"/>
+          <a:bodyPr/>
+          <a:lstStyle/>
+          <a:p/>
         </p:txBody>
       </p:sp>
       <p:sp>
@@ -693,26 +675,27 @@
         </p:nvSpPr>
         <p:spPr/>
         <p:txBody>
-          <a:bodyPr xmlns:a="http://schemas.openxmlformats.org/drawingml/2006/main"/>
-          <a:lstStyle xmlns:a="http://schemas.openxmlformats.org/drawingml/2006/main"/>
-          <a:p xmlns:a="http://schemas.openxmlformats.org/drawingml/2006/main">
+          <a:bodyPr/>
+          <a:lstStyle/>
+          <a:p>
             <a:r>
               <a:rPr lang="zh-CN"/>
               <a:t>数字旁说明命令、数据范围和分母；不只报最好分数。</a:t>
             </a:r>
+            <a:endParaRPr lang="zh-CN"/>
           </a:p>
         </p:txBody>
       </p:sp>
     </p:spTree>
   </p:cSld>
   <p:clrMapOvr>
-    <a:masterClrMapping xmlns:a="http://schemas.openxmlformats.org/drawingml/2006/main"/>
+    <a:masterClrMapping/>
   </p:clrMapOvr>
 </p:notes>
 </file>
 
 <file path=ppt/notesSlides/notesSlide6.xml><?xml version="1.0" encoding="utf-8"?>
-<p:notes xmlns:p="http://schemas.openxmlformats.org/presentationml/2006/main">
+<p:notes xmlns:a="http://schemas.openxmlformats.org/drawingml/2006/main" xmlns:r="http://schemas.openxmlformats.org/officeDocument/2006/relationships" xmlns:p="http://schemas.openxmlformats.org/presentationml/2006/main">
   <p:cSld>
     <p:spTree>
       <p:nvGrpSpPr>
@@ -720,22 +703,20 @@
         <p:cNvGrpSpPr/>
         <p:nvPr/>
       </p:nvGrpSpPr>
-      <p:grpSpPr>
-        <a:xfrm xmlns:a="http://schemas.openxmlformats.org/drawingml/2006/main"/>
-      </p:grpSpPr>
+      <p:grpSpPr/>
       <p:sp>
         <p:nvSpPr>
           <p:cNvPr id="2" name="Slide Image Placeholder 1"/>
           <p:cNvSpPr/>
           <p:nvPr>
-            <p:ph type="sldImg" idx="0"/>
+            <p:ph type="sldImg"/>
           </p:nvPr>
         </p:nvSpPr>
         <p:spPr/>
         <p:txBody>
-          <a:bodyPr xmlns:a="http://schemas.openxmlformats.org/drawingml/2006/main"/>
-          <a:lstStyle xmlns:a="http://schemas.openxmlformats.org/drawingml/2006/main"/>
-          <a:p xmlns:a="http://schemas.openxmlformats.org/drawingml/2006/main"/>
+          <a:bodyPr/>
+          <a:lstStyle/>
+          <a:p/>
         </p:txBody>
       </p:sp>
       <p:sp>
@@ -748,26 +729,27 @@
         </p:nvSpPr>
         <p:spPr/>
         <p:txBody>
-          <a:bodyPr xmlns:a="http://schemas.openxmlformats.org/drawingml/2006/main"/>
-          <a:lstStyle xmlns:a="http://schemas.openxmlformats.org/drawingml/2006/main"/>
-          <a:p xmlns:a="http://schemas.openxmlformats.org/drawingml/2006/main">
+          <a:bodyPr/>
+          <a:lstStyle/>
+          <a:p>
             <a:r>
               <a:rPr lang="zh-CN"/>
               <a:t>展示具体案例，不编造缺失背景或因果故事。</a:t>
             </a:r>
+            <a:endParaRPr lang="zh-CN"/>
           </a:p>
         </p:txBody>
       </p:sp>
     </p:spTree>
   </p:cSld>
   <p:clrMapOvr>
-    <a:masterClrMapping xmlns:a="http://schemas.openxmlformats.org/drawingml/2006/main"/>
+    <a:masterClrMapping/>
   </p:clrMapOvr>
 </p:notes>
 </file>
 
 <file path=ppt/notesSlides/notesSlide7.xml><?xml version="1.0" encoding="utf-8"?>
-<p:notes xmlns:p="http://schemas.openxmlformats.org/presentationml/2006/main">
+<p:notes xmlns:a="http://schemas.openxmlformats.org/drawingml/2006/main" xmlns:r="http://schemas.openxmlformats.org/officeDocument/2006/relationships" xmlns:p="http://schemas.openxmlformats.org/presentationml/2006/main">
   <p:cSld>
     <p:spTree>
       <p:nvGrpSpPr>
@@ -775,22 +757,20 @@
         <p:cNvGrpSpPr/>
         <p:nvPr/>
       </p:nvGrpSpPr>
-      <p:grpSpPr>
-        <a:xfrm xmlns:a="http://schemas.openxmlformats.org/drawingml/2006/main"/>
-      </p:grpSpPr>
+      <p:grpSpPr/>
       <p:sp>
         <p:nvSpPr>
           <p:cNvPr id="2" name="Slide Image Placeholder 1"/>
           <p:cNvSpPr/>
           <p:nvPr>
-            <p:ph type="sldImg" idx="0"/>
+            <p:ph type="sldImg"/>
           </p:nvPr>
         </p:nvSpPr>
         <p:spPr/>
         <p:txBody>
-          <a:bodyPr xmlns:a="http://schemas.openxmlformats.org/drawingml/2006/main"/>
-          <a:lstStyle xmlns:a="http://schemas.openxmlformats.org/drawingml/2006/main"/>
-          <a:p xmlns:a="http://schemas.openxmlformats.org/drawingml/2006/main"/>
+          <a:bodyPr/>
+          <a:lstStyle/>
+          <a:p/>
         </p:txBody>
       </p:sp>
       <p:sp>
@@ -803,26 +783,27 @@
         </p:nvSpPr>
         <p:spPr/>
         <p:txBody>
-          <a:bodyPr xmlns:a="http://schemas.openxmlformats.org/drawingml/2006/main"/>
-          <a:lstStyle xmlns:a="http://schemas.openxmlformats.org/drawingml/2006/main"/>
-          <a:p xmlns:a="http://schemas.openxmlformats.org/drawingml/2006/main">
+          <a:bodyPr/>
+          <a:lstStyle/>
+          <a:p>
             <a:r>
               <a:rPr lang="zh-CN"/>
               <a:t>现场运行或说明最近保存输出；失败时如实标记未复现。</a:t>
             </a:r>
+            <a:endParaRPr lang="zh-CN"/>
           </a:p>
         </p:txBody>
       </p:sp>
     </p:spTree>
   </p:cSld>
   <p:clrMapOvr>
-    <a:masterClrMapping xmlns:a="http://schemas.openxmlformats.org/drawingml/2006/main"/>
+    <a:masterClrMapping/>
   </p:clrMapOvr>
 </p:notes>
 </file>
 
 <file path=ppt/notesSlides/notesSlide8.xml><?xml version="1.0" encoding="utf-8"?>
-<p:notes xmlns:p="http://schemas.openxmlformats.org/presentationml/2006/main">
+<p:notes xmlns:a="http://schemas.openxmlformats.org/drawingml/2006/main" xmlns:r="http://schemas.openxmlformats.org/officeDocument/2006/relationships" xmlns:p="http://schemas.openxmlformats.org/presentationml/2006/main">
   <p:cSld>
     <p:spTree>
       <p:nvGrpSpPr>
@@ -830,22 +811,20 @@
         <p:cNvGrpSpPr/>
         <p:nvPr/>
       </p:nvGrpSpPr>
-      <p:grpSpPr>
-        <a:xfrm xmlns:a="http://schemas.openxmlformats.org/drawingml/2006/main"/>
-      </p:grpSpPr>
+      <p:grpSpPr/>
       <p:sp>
         <p:nvSpPr>
           <p:cNvPr id="2" name="Slide Image Placeholder 1"/>
           <p:cNvSpPr/>
           <p:nvPr>
-            <p:ph type="sldImg" idx="0"/>
+            <p:ph type="sldImg"/>
           </p:nvPr>
         </p:nvSpPr>
         <p:spPr/>
         <p:txBody>
-          <a:bodyPr xmlns:a="http://schemas.openxmlformats.org/drawingml/2006/main"/>
-          <a:lstStyle xmlns:a="http://schemas.openxmlformats.org/drawingml/2006/main"/>
-          <a:p xmlns:a="http://schemas.openxmlformats.org/drawingml/2006/main"/>
+          <a:bodyPr/>
+          <a:lstStyle/>
+          <a:p/>
         </p:txBody>
       </p:sp>
       <p:sp>
@@ -858,26 +837,27 @@
         </p:nvSpPr>
         <p:spPr/>
         <p:txBody>
-          <a:bodyPr xmlns:a="http://schemas.openxmlformats.org/drawingml/2006/main"/>
-          <a:lstStyle xmlns:a="http://schemas.openxmlformats.org/drawingml/2006/main"/>
-          <a:p xmlns:a="http://schemas.openxmlformats.org/drawingml/2006/main">
+          <a:bodyPr/>
+          <a:lstStyle/>
+          <a:p>
             <a:r>
               <a:rPr lang="zh-CN"/>
               <a:t>说清智能体做了什么、学生如何验证和拒绝；用最小下一步收尾。</a:t>
             </a:r>
+            <a:endParaRPr lang="zh-CN"/>
           </a:p>
         </p:txBody>
       </p:sp>
     </p:spTree>
   </p:cSld>
   <p:clrMapOvr>
-    <a:masterClrMapping xmlns:a="http://schemas.openxmlformats.org/drawingml/2006/main"/>
+    <a:masterClrMapping/>
   </p:clrMapOvr>
 </p:notes>
 </file>
 
 <file path=ppt/slideLayouts/slideLayout1.xml><?xml version="1.0" encoding="utf-8"?>
-<p:sldLayout xmlns:p="http://schemas.openxmlformats.org/presentationml/2006/main" type="blank">
+<p:sldLayout xmlns:a="http://schemas.openxmlformats.org/drawingml/2006/main" xmlns:r="http://schemas.openxmlformats.org/officeDocument/2006/relationships" xmlns:p="http://schemas.openxmlformats.org/presentationml/2006/main" type="blank">
   <p:cSld name="Blank">
     <p:spTree>
       <p:nvGrpSpPr>
@@ -888,11 +868,14 @@
       <p:grpSpPr/>
     </p:spTree>
   </p:cSld>
+  <p:clrMapOvr>
+    <a:masterClrMapping/>
+  </p:clrMapOvr>
 </p:sldLayout>
 </file>
 
 <file path=ppt/slideLayouts/slideLayout2.xml><?xml version="1.0" encoding="utf-8"?>
-<p:sldLayout xmlns:p="http://schemas.openxmlformats.org/presentationml/2006/main" type="title">
+<p:sldLayout xmlns:a="http://schemas.openxmlformats.org/drawingml/2006/main" xmlns:r="http://schemas.openxmlformats.org/officeDocument/2006/relationships" xmlns:p="http://schemas.openxmlformats.org/presentationml/2006/main" type="title">
   <p:cSld name="Title Slide">
     <p:spTree>
       <p:nvGrpSpPr>
@@ -905,22 +888,22 @@
         <p:nvSpPr>
           <p:cNvPr id="2" name="Title"/>
           <p:cNvSpPr>
-            <a:spLocks xmlns:a="http://schemas.openxmlformats.org/drawingml/2006/main" noGrp="1"/>
+            <a:spLocks noGrp="1"/>
           </p:cNvSpPr>
           <p:nvPr>
             <p:ph type="ctrTitle"/>
           </p:nvPr>
         </p:nvSpPr>
         <p:spPr>
-          <a:xfrm xmlns:a="http://schemas.openxmlformats.org/drawingml/2006/main">
+          <a:xfrm>
             <a:off x="685800" y="2130425"/>
             <a:ext cx="7772400" cy="1470025"/>
           </a:xfrm>
         </p:spPr>
         <p:txBody>
-          <a:bodyPr xmlns:a="http://schemas.openxmlformats.org/drawingml/2006/main"/>
-          <a:lstStyle xmlns:a="http://schemas.openxmlformats.org/drawingml/2006/main"/>
-          <a:p xmlns:a="http://schemas.openxmlformats.org/drawingml/2006/main">
+          <a:bodyPr/>
+          <a:lstStyle/>
+          <a:p>
             <a:endParaRPr lang="en-US"/>
           </a:p>
         </p:txBody>
@@ -929,33 +912,36 @@
         <p:nvSpPr>
           <p:cNvPr id="3" name="Subtitle"/>
           <p:cNvSpPr>
-            <a:spLocks xmlns:a="http://schemas.openxmlformats.org/drawingml/2006/main" noGrp="1"/>
+            <a:spLocks noGrp="1"/>
           </p:cNvSpPr>
           <p:nvPr>
             <p:ph type="subTitle" idx="1"/>
           </p:nvPr>
         </p:nvSpPr>
         <p:spPr>
-          <a:xfrm xmlns:a="http://schemas.openxmlformats.org/drawingml/2006/main">
+          <a:xfrm>
             <a:off x="1371600" y="3886200"/>
             <a:ext cx="6400800" cy="1752600"/>
           </a:xfrm>
         </p:spPr>
         <p:txBody>
-          <a:bodyPr xmlns:a="http://schemas.openxmlformats.org/drawingml/2006/main"/>
-          <a:lstStyle xmlns:a="http://schemas.openxmlformats.org/drawingml/2006/main"/>
-          <a:p xmlns:a="http://schemas.openxmlformats.org/drawingml/2006/main">
+          <a:bodyPr/>
+          <a:lstStyle/>
+          <a:p>
             <a:endParaRPr lang="en-US"/>
           </a:p>
         </p:txBody>
       </p:sp>
     </p:spTree>
   </p:cSld>
+  <p:clrMapOvr>
+    <a:masterClrMapping/>
+  </p:clrMapOvr>
 </p:sldLayout>
 </file>
 
 <file path=ppt/slideLayouts/slideLayout3.xml><?xml version="1.0" encoding="utf-8"?>
-<p:sldLayout xmlns:p="http://schemas.openxmlformats.org/presentationml/2006/main" type="objTx">
+<p:sldLayout xmlns:a="http://schemas.openxmlformats.org/drawingml/2006/main" xmlns:r="http://schemas.openxmlformats.org/officeDocument/2006/relationships" xmlns:p="http://schemas.openxmlformats.org/presentationml/2006/main" type="objTx">
   <p:cSld name="Title and Content">
     <p:spTree>
       <p:nvGrpSpPr>
@@ -968,22 +954,22 @@
         <p:nvSpPr>
           <p:cNvPr id="2" name="Title"/>
           <p:cNvSpPr>
-            <a:spLocks xmlns:a="http://schemas.openxmlformats.org/drawingml/2006/main" noGrp="1"/>
+            <a:spLocks noGrp="1"/>
           </p:cNvSpPr>
           <p:nvPr>
             <p:ph type="title"/>
           </p:nvPr>
         </p:nvSpPr>
         <p:spPr>
-          <a:xfrm xmlns:a="http://schemas.openxmlformats.org/drawingml/2006/main">
+          <a:xfrm>
             <a:off x="838200" y="365125"/>
             <a:ext cx="10515600" cy="1325563"/>
           </a:xfrm>
         </p:spPr>
         <p:txBody>
-          <a:bodyPr xmlns:a="http://schemas.openxmlformats.org/drawingml/2006/main"/>
-          <a:lstStyle xmlns:a="http://schemas.openxmlformats.org/drawingml/2006/main"/>
-          <a:p xmlns:a="http://schemas.openxmlformats.org/drawingml/2006/main">
+          <a:bodyPr/>
+          <a:lstStyle/>
+          <a:p>
             <a:endParaRPr lang="en-US"/>
           </a:p>
         </p:txBody>
@@ -992,33 +978,36 @@
         <p:nvSpPr>
           <p:cNvPr id="3" name="Content"/>
           <p:cNvSpPr>
-            <a:spLocks xmlns:a="http://schemas.openxmlformats.org/drawingml/2006/main" noGrp="1"/>
+            <a:spLocks noGrp="1"/>
           </p:cNvSpPr>
           <p:nvPr>
             <p:ph type="body" idx="1"/>
           </p:nvPr>
         </p:nvSpPr>
         <p:spPr>
-          <a:xfrm xmlns:a="http://schemas.openxmlformats.org/drawingml/2006/main">
+          <a:xfrm>
             <a:off x="838200" y="1825625"/>
             <a:ext cx="10515600" cy="4351338"/>
           </a:xfrm>
         </p:spPr>
         <p:txBody>
-          <a:bodyPr xmlns:a="http://schemas.openxmlformats.org/drawingml/2006/main"/>
-          <a:lstStyle xmlns:a="http://schemas.openxmlformats.org/drawingml/2006/main"/>
-          <a:p xmlns:a="http://schemas.openxmlformats.org/drawingml/2006/main">
+          <a:bodyPr/>
+          <a:lstStyle/>
+          <a:p>
             <a:endParaRPr lang="en-US"/>
           </a:p>
         </p:txBody>
       </p:sp>
     </p:spTree>
   </p:cSld>
+  <p:clrMapOvr>
+    <a:masterClrMapping/>
+  </p:clrMapOvr>
 </p:sldLayout>
 </file>
 
 <file path=ppt/slideLayouts/slideLayout4.xml><?xml version="1.0" encoding="utf-8"?>
-<p:sldLayout xmlns:p="http://schemas.openxmlformats.org/presentationml/2006/main" type="twoColTx">
+<p:sldLayout xmlns:a="http://schemas.openxmlformats.org/drawingml/2006/main" xmlns:r="http://schemas.openxmlformats.org/officeDocument/2006/relationships" xmlns:p="http://schemas.openxmlformats.org/presentationml/2006/main" type="twoColTx">
   <p:cSld name="Two Content">
     <p:spTree>
       <p:nvGrpSpPr>
@@ -1031,22 +1020,22 @@
         <p:nvSpPr>
           <p:cNvPr id="2" name="Title"/>
           <p:cNvSpPr>
-            <a:spLocks xmlns:a="http://schemas.openxmlformats.org/drawingml/2006/main" noGrp="1"/>
+            <a:spLocks noGrp="1"/>
           </p:cNvSpPr>
           <p:nvPr>
             <p:ph type="title"/>
           </p:nvPr>
         </p:nvSpPr>
         <p:spPr>
-          <a:xfrm xmlns:a="http://schemas.openxmlformats.org/drawingml/2006/main">
+          <a:xfrm>
             <a:off x="838200" y="365125"/>
             <a:ext cx="10515600" cy="1325563"/>
           </a:xfrm>
         </p:spPr>
         <p:txBody>
-          <a:bodyPr xmlns:a="http://schemas.openxmlformats.org/drawingml/2006/main"/>
-          <a:lstStyle xmlns:a="http://schemas.openxmlformats.org/drawingml/2006/main"/>
-          <a:p xmlns:a="http://schemas.openxmlformats.org/drawingml/2006/main">
+          <a:bodyPr/>
+          <a:lstStyle/>
+          <a:p>
             <a:endParaRPr lang="en-US"/>
           </a:p>
         </p:txBody>
@@ -1055,22 +1044,22 @@
         <p:nvSpPr>
           <p:cNvPr id="3" name="Content Left"/>
           <p:cNvSpPr>
-            <a:spLocks xmlns:a="http://schemas.openxmlformats.org/drawingml/2006/main" noGrp="1"/>
+            <a:spLocks noGrp="1"/>
           </p:cNvSpPr>
           <p:nvPr>
             <p:ph type="body" idx="1"/>
           </p:nvPr>
         </p:nvSpPr>
         <p:spPr>
-          <a:xfrm xmlns:a="http://schemas.openxmlformats.org/drawingml/2006/main">
+          <a:xfrm>
             <a:off x="838200" y="1825625"/>
             <a:ext cx="5181600" cy="4351338"/>
           </a:xfrm>
         </p:spPr>
         <p:txBody>
-          <a:bodyPr xmlns:a="http://schemas.openxmlformats.org/drawingml/2006/main"/>
-          <a:lstStyle xmlns:a="http://schemas.openxmlformats.org/drawingml/2006/main"/>
-          <a:p xmlns:a="http://schemas.openxmlformats.org/drawingml/2006/main">
+          <a:bodyPr/>
+          <a:lstStyle/>
+          <a:p>
             <a:endParaRPr lang="en-US"/>
           </a:p>
         </p:txBody>
@@ -1079,33 +1068,36 @@
         <p:nvSpPr>
           <p:cNvPr id="4" name="Content Right"/>
           <p:cNvSpPr>
-            <a:spLocks xmlns:a="http://schemas.openxmlformats.org/drawingml/2006/main" noGrp="1"/>
+            <a:spLocks noGrp="1"/>
           </p:cNvSpPr>
           <p:nvPr>
             <p:ph type="body" idx="2"/>
           </p:nvPr>
         </p:nvSpPr>
         <p:spPr>
-          <a:xfrm xmlns:a="http://schemas.openxmlformats.org/drawingml/2006/main">
+          <a:xfrm>
             <a:off x="6172200" y="1825625"/>
             <a:ext cx="5181600" cy="4351338"/>
           </a:xfrm>
         </p:spPr>
         <p:txBody>
-          <a:bodyPr xmlns:a="http://schemas.openxmlformats.org/drawingml/2006/main"/>
-          <a:lstStyle xmlns:a="http://schemas.openxmlformats.org/drawingml/2006/main"/>
-          <a:p xmlns:a="http://schemas.openxmlformats.org/drawingml/2006/main">
+          <a:bodyPr/>
+          <a:lstStyle/>
+          <a:p>
             <a:endParaRPr lang="en-US"/>
           </a:p>
         </p:txBody>
       </p:sp>
     </p:spTree>
   </p:cSld>
+  <p:clrMapOvr>
+    <a:masterClrMapping/>
+  </p:clrMapOvr>
 </p:sldLayout>
 </file>
 
 <file path=ppt/slideLayouts/slideLayout5.xml><?xml version="1.0" encoding="utf-8"?>
-<p:sldLayout xmlns:p="http://schemas.openxmlformats.org/presentationml/2006/main" type="titleOnly">
+<p:sldLayout xmlns:a="http://schemas.openxmlformats.org/drawingml/2006/main" xmlns:r="http://schemas.openxmlformats.org/officeDocument/2006/relationships" xmlns:p="http://schemas.openxmlformats.org/presentationml/2006/main" type="titleOnly">
   <p:cSld name="Title Only">
     <p:spTree>
       <p:nvGrpSpPr>
@@ -1118,34 +1110,42 @@
         <p:nvSpPr>
           <p:cNvPr id="2" name="Title"/>
           <p:cNvSpPr>
-            <a:spLocks xmlns:a="http://schemas.openxmlformats.org/drawingml/2006/main" noGrp="1"/>
+            <a:spLocks noGrp="1"/>
           </p:cNvSpPr>
           <p:nvPr>
             <p:ph type="title"/>
           </p:nvPr>
         </p:nvSpPr>
         <p:spPr>
-          <a:xfrm xmlns:a="http://schemas.openxmlformats.org/drawingml/2006/main">
+          <a:xfrm>
             <a:off x="838200" y="365125"/>
             <a:ext cx="10515600" cy="1325563"/>
           </a:xfrm>
         </p:spPr>
         <p:txBody>
-          <a:bodyPr xmlns:a="http://schemas.openxmlformats.org/drawingml/2006/main"/>
-          <a:lstStyle xmlns:a="http://schemas.openxmlformats.org/drawingml/2006/main"/>
-          <a:p xmlns:a="http://schemas.openxmlformats.org/drawingml/2006/main">
+          <a:bodyPr/>
+          <a:lstStyle/>
+          <a:p>
             <a:endParaRPr lang="en-US"/>
           </a:p>
         </p:txBody>
       </p:sp>
     </p:spTree>
   </p:cSld>
+  <p:clrMapOvr>
+    <a:masterClrMapping/>
+  </p:clrMapOvr>
 </p:sldLayout>
 </file>
 
 <file path=ppt/slideMasters/slideMaster1.xml><?xml version="1.0" encoding="utf-8"?>
-<p:sldMaster xmlns:r="http://schemas.openxmlformats.org/officeDocument/2006/relationships" xmlns:p="http://schemas.openxmlformats.org/presentationml/2006/main">
+<p:sldMaster xmlns:a="http://schemas.openxmlformats.org/drawingml/2006/main" xmlns:r="http://schemas.openxmlformats.org/officeDocument/2006/relationships" xmlns:p="http://schemas.openxmlformats.org/presentationml/2006/main">
   <p:cSld>
+    <p:bg>
+      <p:bgRef idx="1001">
+        <a:schemeClr val="bg1"/>
+      </p:bgRef>
+    </p:bg>
     <p:spTree>
       <p:nvGrpSpPr>
         <p:cNvPr id="1" name=""/>
@@ -1157,23 +1157,29 @@
   </p:cSld>
   <p:clrMap bg1="lt1" tx1="dk1" bg2="lt2" tx2="dk2" accent1="accent1" accent2="accent2" accent3="accent3" accent4="accent4" accent5="accent5" accent6="accent6" hlink="hlink" folHlink="folHlink"/>
   <p:sldLayoutIdLst>
-    <p:sldLayoutId xmlns:r="http://schemas.openxmlformats.org/officeDocument/2006/relationships" id="2147483649" r:id="rId1"/>
-    <p:sldLayoutId xmlns:r="http://schemas.openxmlformats.org/officeDocument/2006/relationships" id="2147483650" r:id="rId2"/>
-    <p:sldLayoutId xmlns:r="http://schemas.openxmlformats.org/officeDocument/2006/relationships" id="2147483651" r:id="rId3"/>
-    <p:sldLayoutId xmlns:r="http://schemas.openxmlformats.org/officeDocument/2006/relationships" id="2147483652" r:id="rId4"/>
-    <p:sldLayoutId xmlns:r="http://schemas.openxmlformats.org/officeDocument/2006/relationships" id="2147483653" r:id="rId5"/>
+    <p:sldLayoutId id="2147483649" r:id="rId1"/>
+    <p:sldLayoutId id="2147483650" r:id="rId2"/>
+    <p:sldLayoutId id="2147483651" r:id="rId3"/>
+    <p:sldLayoutId id="2147483652" r:id="rId4"/>
+    <p:sldLayoutId id="2147483653" r:id="rId5"/>
   </p:sldLayoutIdLst>
+  <p:txStyles>
+    <p:titleStyle/>
+    <p:bodyStyle/>
+    <p:otherStyle/>
+  </p:txStyles>
 </p:sldMaster>
 </file>
 
 <file path=ppt/slides/slide1.xml><?xml version="1.0" encoding="utf-8"?>
-<p:sld xmlns:p="http://schemas.openxmlformats.org/presentationml/2006/main">
+<p:sld xmlns:a="http://schemas.openxmlformats.org/drawingml/2006/main" xmlns:r="http://schemas.openxmlformats.org/officeDocument/2006/relationships" xmlns:p="http://schemas.openxmlformats.org/presentationml/2006/main">
   <p:cSld>
     <p:bg>
       <p:bgPr>
-        <a:solidFill xmlns:a="http://schemas.openxmlformats.org/drawingml/2006/main">
+        <a:solidFill>
           <a:srgbClr val="183B45"/>
         </a:solidFill>
+        <a:effectLst/>
       </p:bgPr>
     </p:bg>
     <p:spTree>
@@ -1190,31 +1196,38 @@
           <p:nvPr/>
         </p:nvSpPr>
         <p:spPr>
-          <a:xfrm xmlns:a="http://schemas.openxmlformats.org/drawingml/2006/main">
+          <a:xfrm>
             <a:off x="540000" y="360000"/>
             <a:ext cx="4320000" cy="360000"/>
           </a:xfrm>
-          <a:prstGeom xmlns:a="http://schemas.openxmlformats.org/drawingml/2006/main" prst="rect">
-            <a:avLst/>
-          </a:prstGeom>
-        </p:spPr>
-        <p:txBody>
-          <a:bodyPr xmlns:a="http://schemas.openxmlformats.org/drawingml/2006/main" lIns="43200" tIns="43200" rIns="43200" bIns="43200" anchor="ctr">
+          <a:prstGeom prst="rect">
+            <a:avLst/>
+          </a:prstGeom>
+        </p:spPr>
+        <p:txBody>
+          <a:bodyPr lIns="43200" tIns="43200" rIns="43200" bIns="43200" anchor="ctr">
             <a:normAutofit/>
           </a:bodyPr>
-          <a:lstStyle xmlns:a="http://schemas.openxmlformats.org/drawingml/2006/main"/>
-          <a:p xmlns:a="http://schemas.openxmlformats.org/drawingml/2006/main">
+          <a:lstStyle/>
+          <a:p>
             <a:pPr algn="l"/>
             <a:r>
               <a:rPr lang="zh-CN" sz="1600" b="1">
                 <a:solidFill>
                   <a:srgbClr val="8DDDD0"/>
                 </a:solidFill>
-                <a:latin typeface="Microsoft YaHei"/>
-                <a:ea typeface="Microsoft YaHei"/>
+                <a:latin typeface="微软雅黑" panose="020B0503020204020204" charset="-122"/>
+                <a:ea typeface="微软雅黑" panose="020B0503020204020204" charset="-122"/>
               </a:rPr>
               <a:t>01 · 45 秒</a:t>
             </a:r>
+            <a:endParaRPr lang="zh-CN" sz="1600" b="1">
+              <a:solidFill>
+                <a:srgbClr val="8DDDD0"/>
+              </a:solidFill>
+              <a:latin typeface="微软雅黑" panose="020B0503020204020204" charset="-122"/>
+              <a:ea typeface="微软雅黑" panose="020B0503020204020204" charset="-122"/>
+            </a:endParaRPr>
           </a:p>
         </p:txBody>
       </p:sp>
@@ -1225,31 +1238,38 @@
           <p:nvPr/>
         </p:nvSpPr>
         <p:spPr>
-          <a:xfrm xmlns:a="http://schemas.openxmlformats.org/drawingml/2006/main">
+          <a:xfrm>
             <a:off x="540000" y="756000"/>
             <a:ext cx="10800000" cy="864000"/>
           </a:xfrm>
-          <a:prstGeom xmlns:a="http://schemas.openxmlformats.org/drawingml/2006/main" prst="rect">
-            <a:avLst/>
-          </a:prstGeom>
-        </p:spPr>
-        <p:txBody>
-          <a:bodyPr xmlns:a="http://schemas.openxmlformats.org/drawingml/2006/main" lIns="43200" tIns="43200" rIns="43200" bIns="43200" anchor="ctr">
+          <a:prstGeom prst="rect">
+            <a:avLst/>
+          </a:prstGeom>
+        </p:spPr>
+        <p:txBody>
+          <a:bodyPr lIns="43200" tIns="43200" rIns="43200" bIns="43200" anchor="ctr">
             <a:normAutofit/>
           </a:bodyPr>
-          <a:lstStyle xmlns:a="http://schemas.openxmlformats.org/drawingml/2006/main"/>
-          <a:p xmlns:a="http://schemas.openxmlformats.org/drawingml/2006/main">
+          <a:lstStyle/>
+          <a:p>
             <a:pPr algn="l"/>
             <a:r>
               <a:rPr lang="zh-CN" sz="4000" b="1">
                 <a:solidFill>
                   <a:srgbClr val="FFFFFF"/>
                 </a:solidFill>
-                <a:latin typeface="Microsoft YaHei"/>
-                <a:ea typeface="Microsoft YaHei"/>
+                <a:latin typeface="微软雅黑" panose="020B0503020204020204" charset="-122"/>
+                <a:ea typeface="微软雅黑" panose="020B0503020204020204" charset="-122"/>
               </a:rPr>
               <a:t>真实问题与使用者</a:t>
             </a:r>
+            <a:endParaRPr lang="zh-CN" sz="4000" b="1">
+              <a:solidFill>
+                <a:srgbClr val="FFFFFF"/>
+              </a:solidFill>
+              <a:latin typeface="微软雅黑" panose="020B0503020204020204" charset="-122"/>
+              <a:ea typeface="微软雅黑" panose="020B0503020204020204" charset="-122"/>
+            </a:endParaRPr>
           </a:p>
         </p:txBody>
       </p:sp>
@@ -1260,37 +1280,84 @@
           <p:nvPr/>
         </p:nvSpPr>
         <p:spPr>
-          <a:xfrm xmlns:a="http://schemas.openxmlformats.org/drawingml/2006/main">
+          <a:xfrm>
             <a:off x="540000" y="2160000"/>
             <a:ext cx="5292000" cy="2340000"/>
           </a:xfrm>
-          <a:prstGeom xmlns:a="http://schemas.openxmlformats.org/drawingml/2006/main" prst="roundRect">
-            <a:avLst/>
-          </a:prstGeom>
-          <a:solidFill xmlns:a="http://schemas.openxmlformats.org/drawingml/2006/main">
+          <a:prstGeom prst="roundRect">
+            <a:avLst/>
+          </a:prstGeom>
+          <a:solidFill>
             <a:srgbClr val="D7F4EE"/>
           </a:solidFill>
-          <a:ln xmlns:a="http://schemas.openxmlformats.org/drawingml/2006/main">
+          <a:ln>
             <a:noFill/>
           </a:ln>
         </p:spPr>
         <p:txBody>
-          <a:bodyPr xmlns:a="http://schemas.openxmlformats.org/drawingml/2006/main" lIns="90000" tIns="90000" rIns="90000" bIns="90000" anchor="ctr">
+          <a:bodyPr lIns="90000" tIns="90000" rIns="90000" bIns="90000" anchor="ctr">
             <a:normAutofit/>
           </a:bodyPr>
-          <a:lstStyle xmlns:a="http://schemas.openxmlformats.org/drawingml/2006/main"/>
-          <a:p xmlns:a="http://schemas.openxmlformats.org/drawingml/2006/main">
+          <a:lstStyle/>
+          <a:p>
             <a:pPr algn="ctr"/>
             <a:r>
-              <a:rPr lang="zh-CN" sz="2300" b="1">
+              <a:rPr lang="zh-CN" altLang="en-US" sz="2300" b="1">
                 <a:solidFill>
                   <a:srgbClr val="123A3A"/>
                 </a:solidFill>
-                <a:latin typeface="Microsoft YaHei"/>
-                <a:ea typeface="Microsoft YaHei"/>
-              </a:rPr>
-              <a:t>使用者与小决定</a:t>
-            </a:r>
+                <a:latin typeface="微软雅黑" panose="020B0503020204020204" charset="-122"/>
+                <a:ea typeface="微软雅黑" panose="020B0503020204020204" charset="-122"/>
+              </a:rPr>
+              <a:t>使用者：回收站分类员，分拣时要知道"这张垃圾扔哪个桶"</a:t>
+            </a:r>
+            <a:endParaRPr lang="zh-CN" altLang="en-US" sz="2300" b="1">
+              <a:solidFill>
+                <a:srgbClr val="123A3A"/>
+              </a:solidFill>
+              <a:latin typeface="微软雅黑" panose="020B0503020204020204" charset="-122"/>
+              <a:ea typeface="微软雅黑" panose="020B0503020204020204" charset="-122"/>
+            </a:endParaRPr>
+          </a:p>
+          <a:p>
+            <a:pPr algn="ctr"/>
+            <a:r>
+              <a:rPr lang="zh-CN" altLang="en-US" sz="2300" b="1">
+                <a:solidFill>
+                  <a:srgbClr val="123A3A"/>
+                </a:solidFill>
+                <a:latin typeface="微软雅黑" panose="020B0503020204020204" charset="-122"/>
+                <a:ea typeface="微软雅黑" panose="020B0503020204020204" charset="-122"/>
+              </a:rPr>
+              <a:t>帮 </a:t>
+            </a:r>
+            <a:r>
+              <a:rPr lang="en-US" altLang="zh-CN" sz="2300" b="1">
+                <a:solidFill>
+                  <a:srgbClr val="123A3A"/>
+                </a:solidFill>
+                <a:latin typeface="微软雅黑" panose="020B0503020204020204" charset="-122"/>
+                <a:ea typeface="微软雅黑" panose="020B0503020204020204" charset="-122"/>
+              </a:rPr>
+              <a:t>TA </a:t>
+            </a:r>
+            <a:r>
+              <a:rPr lang="zh-CN" altLang="en-US" sz="2300" b="1">
+                <a:solidFill>
+                  <a:srgbClr val="123A3A"/>
+                </a:solidFill>
+                <a:latin typeface="微软雅黑" panose="020B0503020204020204" charset="-122"/>
+                <a:ea typeface="微软雅黑" panose="020B0503020204020204" charset="-122"/>
+              </a:rPr>
+              <a:t>完成第一级分拣</a:t>
+            </a:r>
+            <a:endParaRPr lang="zh-CN" altLang="en-US" sz="2300" b="1">
+              <a:solidFill>
+                <a:srgbClr val="123A3A"/>
+              </a:solidFill>
+              <a:latin typeface="微软雅黑" panose="020B0503020204020204" charset="-122"/>
+              <a:ea typeface="微软雅黑" panose="020B0503020204020204" charset="-122"/>
+            </a:endParaRPr>
           </a:p>
         </p:txBody>
       </p:sp>
@@ -1301,37 +1368,44 @@
           <p:nvPr/>
         </p:nvSpPr>
         <p:spPr>
-          <a:xfrm xmlns:a="http://schemas.openxmlformats.org/drawingml/2006/main">
+          <a:xfrm>
             <a:off x="6156000" y="2160000"/>
             <a:ext cx="5436000" cy="2340000"/>
           </a:xfrm>
-          <a:prstGeom xmlns:a="http://schemas.openxmlformats.org/drawingml/2006/main" prst="roundRect">
-            <a:avLst/>
-          </a:prstGeom>
-          <a:solidFill xmlns:a="http://schemas.openxmlformats.org/drawingml/2006/main">
+          <a:prstGeom prst="roundRect">
+            <a:avLst/>
+          </a:prstGeom>
+          <a:solidFill>
             <a:srgbClr val="C9E8F2"/>
           </a:solidFill>
-          <a:ln xmlns:a="http://schemas.openxmlformats.org/drawingml/2006/main">
+          <a:ln>
             <a:noFill/>
           </a:ln>
         </p:spPr>
         <p:txBody>
-          <a:bodyPr xmlns:a="http://schemas.openxmlformats.org/drawingml/2006/main" lIns="90000" tIns="90000" rIns="90000" bIns="90000" anchor="ctr">
+          <a:bodyPr lIns="90000" tIns="90000" rIns="90000" bIns="90000" anchor="ctr">
             <a:normAutofit/>
           </a:bodyPr>
-          <a:lstStyle xmlns:a="http://schemas.openxmlformats.org/drawingml/2006/main"/>
-          <a:p xmlns:a="http://schemas.openxmlformats.org/drawingml/2006/main">
+          <a:lstStyle/>
+          <a:p>
             <a:pPr algn="ctr"/>
             <a:r>
-              <a:rPr lang="zh-CN" sz="2300" b="1">
+              <a:rPr lang="zh-CN" altLang="en-US" sz="2300" b="1">
                 <a:solidFill>
                   <a:srgbClr val="173F5F"/>
                 </a:solidFill>
-                <a:latin typeface="Microsoft YaHei"/>
-                <a:ea typeface="Microsoft YaHei"/>
-              </a:rPr>
-              <a:t>真实输入与可检查输出</a:t>
-            </a:r>
+                <a:latin typeface="微软雅黑" panose="020B0503020204020204" charset="-122"/>
+                <a:ea typeface="微软雅黑" panose="020B0503020204020204" charset="-122"/>
+              </a:rPr>
+              <a:t>输入：一张垃圾照片 → 输出：可回收物/厨余垃圾/有害垃圾/其他垃圾</a:t>
+            </a:r>
+            <a:endParaRPr lang="zh-CN" altLang="en-US" sz="2300" b="1">
+              <a:solidFill>
+                <a:srgbClr val="173F5F"/>
+              </a:solidFill>
+              <a:latin typeface="微软雅黑" panose="020B0503020204020204" charset="-122"/>
+              <a:ea typeface="微软雅黑" panose="020B0503020204020204" charset="-122"/>
+            </a:endParaRPr>
           </a:p>
         </p:txBody>
       </p:sp>
@@ -1342,47 +1416,48 @@
           <p:nvPr/>
         </p:nvSpPr>
         <p:spPr>
-          <a:xfrm xmlns:a="http://schemas.openxmlformats.org/drawingml/2006/main">
+          <a:xfrm>
             <a:off x="720000" y="5184000"/>
             <a:ext cx="10764000" cy="432000"/>
           </a:xfrm>
-          <a:prstGeom xmlns:a="http://schemas.openxmlformats.org/drawingml/2006/main" prst="rect">
-            <a:avLst/>
-          </a:prstGeom>
-        </p:spPr>
-        <p:txBody>
-          <a:bodyPr xmlns:a="http://schemas.openxmlformats.org/drawingml/2006/main" lIns="43200" tIns="43200" rIns="43200" bIns="43200" anchor="ctr">
+          <a:prstGeom prst="rect">
+            <a:avLst/>
+          </a:prstGeom>
+        </p:spPr>
+        <p:txBody>
+          <a:bodyPr lIns="43200" tIns="43200" rIns="43200" bIns="43200" anchor="ctr">
             <a:normAutofit/>
           </a:bodyPr>
-          <a:lstStyle xmlns:a="http://schemas.openxmlformats.org/drawingml/2006/main"/>
-          <a:p xmlns:a="http://schemas.openxmlformats.org/drawingml/2006/main">
+          <a:lstStyle/>
+          <a:p>
             <a:pPr algn="ctr"/>
-            <a:r>
-              <a:rPr lang="zh-CN" sz="1800" b="0">
-                <a:solidFill>
-                  <a:srgbClr val="D6F5EE"/>
-                </a:solidFill>
-                <a:latin typeface="Microsoft YaHei"/>
-                <a:ea typeface="Microsoft YaHei"/>
-              </a:rPr>
-              <a:t>总时长 10 分钟 · 每个数字都要能回到代码、命令或真实样本</a:t>
-            </a:r>
+            <a:endParaRPr lang="zh-CN" sz="1800" b="0">
+              <a:solidFill>
+                <a:srgbClr val="D6F5EE"/>
+              </a:solidFill>
+              <a:latin typeface="微软雅黑" panose="020B0503020204020204" charset="-122"/>
+              <a:ea typeface="微软雅黑" panose="020B0503020204020204" charset="-122"/>
+            </a:endParaRPr>
           </a:p>
         </p:txBody>
       </p:sp>
     </p:spTree>
   </p:cSld>
+  <p:clrMapOvr>
+    <a:masterClrMapping/>
+  </p:clrMapOvr>
 </p:sld>
 </file>
 
 <file path=ppt/slides/slide2.xml><?xml version="1.0" encoding="utf-8"?>
-<p:sld xmlns:p="http://schemas.openxmlformats.org/presentationml/2006/main">
+<p:sld xmlns:a="http://schemas.openxmlformats.org/drawingml/2006/main" xmlns:r="http://schemas.openxmlformats.org/officeDocument/2006/relationships" xmlns:p="http://schemas.openxmlformats.org/presentationml/2006/main">
   <p:cSld>
     <p:bg>
       <p:bgPr>
-        <a:solidFill xmlns:a="http://schemas.openxmlformats.org/drawingml/2006/main">
+        <a:solidFill>
           <a:srgbClr val="F7FBFA"/>
         </a:solidFill>
+        <a:effectLst/>
       </p:bgPr>
     </p:bg>
     <p:spTree>
@@ -1399,31 +1474,38 @@
           <p:nvPr/>
         </p:nvSpPr>
         <p:spPr>
-          <a:xfrm xmlns:a="http://schemas.openxmlformats.org/drawingml/2006/main">
+          <a:xfrm>
             <a:off x="540000" y="252000"/>
             <a:ext cx="5400000" cy="288000"/>
           </a:xfrm>
-          <a:prstGeom xmlns:a="http://schemas.openxmlformats.org/drawingml/2006/main" prst="rect">
-            <a:avLst/>
-          </a:prstGeom>
-        </p:spPr>
-        <p:txBody>
-          <a:bodyPr xmlns:a="http://schemas.openxmlformats.org/drawingml/2006/main" lIns="43200" tIns="43200" rIns="43200" bIns="43200" anchor="ctr">
+          <a:prstGeom prst="rect">
+            <a:avLst/>
+          </a:prstGeom>
+        </p:spPr>
+        <p:txBody>
+          <a:bodyPr lIns="43200" tIns="43200" rIns="43200" bIns="43200" anchor="ctr">
             <a:normAutofit/>
           </a:bodyPr>
-          <a:lstStyle xmlns:a="http://schemas.openxmlformats.org/drawingml/2006/main"/>
-          <a:p xmlns:a="http://schemas.openxmlformats.org/drawingml/2006/main">
+          <a:lstStyle/>
+          <a:p>
             <a:pPr algn="l"/>
             <a:r>
               <a:rPr lang="zh-CN" sz="1400" b="1">
                 <a:solidFill>
                   <a:srgbClr val="028090"/>
                 </a:solidFill>
-                <a:latin typeface="Microsoft YaHei"/>
-                <a:ea typeface="Microsoft YaHei"/>
+                <a:latin typeface="微软雅黑" panose="020B0503020204020204" charset="-122"/>
+                <a:ea typeface="微软雅黑" panose="020B0503020204020204" charset="-122"/>
               </a:rPr>
               <a:t>02 · 60 秒</a:t>
             </a:r>
+            <a:endParaRPr lang="zh-CN" sz="1400" b="1">
+              <a:solidFill>
+                <a:srgbClr val="028090"/>
+              </a:solidFill>
+              <a:latin typeface="微软雅黑" panose="020B0503020204020204" charset="-122"/>
+              <a:ea typeface="微软雅黑" panose="020B0503020204020204" charset="-122"/>
+            </a:endParaRPr>
           </a:p>
         </p:txBody>
       </p:sp>
@@ -1434,31 +1516,38 @@
           <p:nvPr/>
         </p:nvSpPr>
         <p:spPr>
-          <a:xfrm xmlns:a="http://schemas.openxmlformats.org/drawingml/2006/main">
+          <a:xfrm>
             <a:off x="540000" y="558000"/>
             <a:ext cx="10980000" cy="756000"/>
           </a:xfrm>
-          <a:prstGeom xmlns:a="http://schemas.openxmlformats.org/drawingml/2006/main" prst="rect">
-            <a:avLst/>
-          </a:prstGeom>
-        </p:spPr>
-        <p:txBody>
-          <a:bodyPr xmlns:a="http://schemas.openxmlformats.org/drawingml/2006/main" lIns="43200" tIns="43200" rIns="43200" bIns="43200" anchor="ctr">
+          <a:prstGeom prst="rect">
+            <a:avLst/>
+          </a:prstGeom>
+        </p:spPr>
+        <p:txBody>
+          <a:bodyPr lIns="43200" tIns="43200" rIns="43200" bIns="43200" anchor="ctr">
             <a:normAutofit/>
           </a:bodyPr>
-          <a:lstStyle xmlns:a="http://schemas.openxmlformats.org/drawingml/2006/main"/>
-          <a:p xmlns:a="http://schemas.openxmlformats.org/drawingml/2006/main">
+          <a:lstStyle/>
+          <a:p>
             <a:pPr algn="l"/>
             <a:r>
               <a:rPr lang="zh-CN" sz="3800" b="1">
                 <a:solidFill>
                   <a:srgbClr val="183B45"/>
                 </a:solidFill>
-                <a:latin typeface="Microsoft YaHei"/>
-                <a:ea typeface="Microsoft YaHei"/>
+                <a:latin typeface="微软雅黑" panose="020B0503020204020204" charset="-122"/>
+                <a:ea typeface="微软雅黑" panose="020B0503020204020204" charset="-122"/>
               </a:rPr>
               <a:t>真实数据契约</a:t>
             </a:r>
+            <a:endParaRPr lang="zh-CN" sz="3800" b="1">
+              <a:solidFill>
+                <a:srgbClr val="183B45"/>
+              </a:solidFill>
+              <a:latin typeface="微软雅黑" panose="020B0503020204020204" charset="-122"/>
+              <a:ea typeface="微软雅黑" panose="020B0503020204020204" charset="-122"/>
+            </a:endParaRPr>
           </a:p>
         </p:txBody>
       </p:sp>
@@ -1469,24 +1558,24 @@
           <p:nvPr/>
         </p:nvSpPr>
         <p:spPr>
-          <a:xfrm xmlns:a="http://schemas.openxmlformats.org/drawingml/2006/main">
+          <a:xfrm>
             <a:off x="11232000" y="252000"/>
             <a:ext cx="396000" cy="396000"/>
           </a:xfrm>
-          <a:prstGeom xmlns:a="http://schemas.openxmlformats.org/drawingml/2006/main" prst="ellipse">
-            <a:avLst/>
-          </a:prstGeom>
-          <a:solidFill xmlns:a="http://schemas.openxmlformats.org/drawingml/2006/main">
+          <a:prstGeom prst="ellipse">
+            <a:avLst/>
+          </a:prstGeom>
+          <a:solidFill>
             <a:srgbClr val="02C39A"/>
           </a:solidFill>
-          <a:ln xmlns:a="http://schemas.openxmlformats.org/drawingml/2006/main">
+          <a:ln>
             <a:noFill/>
           </a:ln>
         </p:spPr>
         <p:txBody>
-          <a:bodyPr xmlns:a="http://schemas.openxmlformats.org/drawingml/2006/main"/>
-          <a:lstStyle xmlns:a="http://schemas.openxmlformats.org/drawingml/2006/main"/>
-          <a:p xmlns:a="http://schemas.openxmlformats.org/drawingml/2006/main"/>
+          <a:bodyPr/>
+          <a:lstStyle/>
+          <a:p/>
         </p:txBody>
       </p:sp>
       <p:sp>
@@ -1496,37 +1585,44 @@
           <p:nvPr/>
         </p:nvSpPr>
         <p:spPr>
-          <a:xfrm xmlns:a="http://schemas.openxmlformats.org/drawingml/2006/main">
+          <a:xfrm>
             <a:off x="540000" y="2160000"/>
             <a:ext cx="5292000" cy="2340000"/>
           </a:xfrm>
-          <a:prstGeom xmlns:a="http://schemas.openxmlformats.org/drawingml/2006/main" prst="roundRect">
-            <a:avLst/>
-          </a:prstGeom>
-          <a:solidFill xmlns:a="http://schemas.openxmlformats.org/drawingml/2006/main">
+          <a:prstGeom prst="roundRect">
+            <a:avLst/>
+          </a:prstGeom>
+          <a:solidFill>
             <a:srgbClr val="183B45"/>
           </a:solidFill>
-          <a:ln xmlns:a="http://schemas.openxmlformats.org/drawingml/2006/main">
+          <a:ln>
             <a:noFill/>
           </a:ln>
         </p:spPr>
         <p:txBody>
-          <a:bodyPr xmlns:a="http://schemas.openxmlformats.org/drawingml/2006/main" lIns="90000" tIns="90000" rIns="90000" bIns="90000" anchor="ctr">
+          <a:bodyPr lIns="90000" tIns="90000" rIns="90000" bIns="90000" anchor="ctr">
             <a:normAutofit/>
           </a:bodyPr>
-          <a:lstStyle xmlns:a="http://schemas.openxmlformats.org/drawingml/2006/main"/>
-          <a:p xmlns:a="http://schemas.openxmlformats.org/drawingml/2006/main">
+          <a:lstStyle/>
+          <a:p>
             <a:pPr algn="ctr"/>
             <a:r>
-              <a:rPr lang="zh-CN" sz="2300" b="1">
+              <a:rPr lang="en-US" altLang="zh-CN" sz="2300" b="1">
                 <a:solidFill>
                   <a:srgbClr val="FFFFFF"/>
                 </a:solidFill>
-                <a:latin typeface="Microsoft YaHei"/>
-                <a:ea typeface="Microsoft YaHei"/>
-              </a:rPr>
-              <a:t>所有者 · URL · 许可</a:t>
-            </a:r>
+                <a:latin typeface="微软雅黑" panose="020B0503020204020204" charset="-122"/>
+                <a:ea typeface="微软雅黑" panose="020B0503020204020204" charset="-122"/>
+              </a:rPr>
+              <a:t>Kaggle "Garbage classification dataset"（shanlan426），Apache 2.0</a:t>
+            </a:r>
+            <a:endParaRPr lang="zh-CN" altLang="en-US" sz="2300" b="1">
+              <a:solidFill>
+                <a:srgbClr val="FFFFFF"/>
+              </a:solidFill>
+              <a:latin typeface="微软雅黑" panose="020B0503020204020204" charset="-122"/>
+              <a:ea typeface="微软雅黑" panose="020B0503020204020204" charset="-122"/>
+            </a:endParaRPr>
           </a:p>
         </p:txBody>
       </p:sp>
@@ -1537,37 +1633,84 @@
           <p:nvPr/>
         </p:nvSpPr>
         <p:spPr>
-          <a:xfrm xmlns:a="http://schemas.openxmlformats.org/drawingml/2006/main">
+          <a:xfrm>
             <a:off x="6156000" y="2160000"/>
             <a:ext cx="5436000" cy="2340000"/>
           </a:xfrm>
-          <a:prstGeom xmlns:a="http://schemas.openxmlformats.org/drawingml/2006/main" prst="roundRect">
-            <a:avLst/>
-          </a:prstGeom>
-          <a:solidFill xmlns:a="http://schemas.openxmlformats.org/drawingml/2006/main">
+          <a:prstGeom prst="roundRect">
+            <a:avLst/>
+          </a:prstGeom>
+          <a:solidFill>
             <a:srgbClr val="02C39A"/>
           </a:solidFill>
-          <a:ln xmlns:a="http://schemas.openxmlformats.org/drawingml/2006/main">
+          <a:ln>
             <a:noFill/>
           </a:ln>
         </p:spPr>
         <p:txBody>
-          <a:bodyPr xmlns:a="http://schemas.openxmlformats.org/drawingml/2006/main" lIns="90000" tIns="90000" rIns="90000" bIns="90000" anchor="ctr">
+          <a:bodyPr lIns="90000" tIns="90000" rIns="90000" bIns="90000" anchor="ctr">
             <a:normAutofit/>
           </a:bodyPr>
-          <a:lstStyle xmlns:a="http://schemas.openxmlformats.org/drawingml/2006/main"/>
-          <a:p xmlns:a="http://schemas.openxmlformats.org/drawingml/2006/main">
+          <a:lstStyle/>
+          <a:p>
             <a:pPr algn="ctr"/>
             <a:r>
-              <a:rPr lang="zh-CN" sz="2300" b="1">
+              <a:rPr lang="zh-CN" altLang="en-US" sz="2300" b="1">
                 <a:solidFill>
                   <a:srgbClr val="083B35"/>
                 </a:solidFill>
-                <a:latin typeface="Microsoft YaHei"/>
-                <a:ea typeface="Microsoft YaHei"/>
-              </a:rPr>
-              <a:t>文件 · 检查 · 已知限制</a:t>
-            </a:r>
+                <a:latin typeface="微软雅黑" panose="020B0503020204020204" charset="-122"/>
+                <a:ea typeface="微软雅黑" panose="020B0503020204020204" charset="-122"/>
+              </a:rPr>
+              <a:t>55 个细类按前缀合并成 4 大类，共 12094 张</a:t>
+            </a:r>
+            <a:endParaRPr lang="zh-CN" altLang="en-US" sz="2300" b="1">
+              <a:solidFill>
+                <a:srgbClr val="083B35"/>
+              </a:solidFill>
+              <a:latin typeface="微软雅黑" panose="020B0503020204020204" charset="-122"/>
+              <a:ea typeface="微软雅黑" panose="020B0503020204020204" charset="-122"/>
+            </a:endParaRPr>
+          </a:p>
+          <a:p>
+            <a:pPr algn="ctr"/>
+            <a:r>
+              <a:rPr lang="zh-CN" altLang="en-US" sz="2300" b="1">
+                <a:solidFill>
+                  <a:srgbClr val="083B35"/>
+                </a:solidFill>
+                <a:latin typeface="微软雅黑" panose="020B0503020204020204" charset="-122"/>
+                <a:ea typeface="微软雅黑" panose="020B0503020204020204" charset="-122"/>
+              </a:rPr>
+              <a:t>固定 80/20 划分（</a:t>
+            </a:r>
+            <a:r>
+              <a:rPr lang="en-US" altLang="zh-CN" sz="2300" b="1">
+                <a:solidFill>
+                  <a:srgbClr val="083B35"/>
+                </a:solidFill>
+                <a:latin typeface="微软雅黑" panose="020B0503020204020204" charset="-122"/>
+                <a:ea typeface="微软雅黑" panose="020B0503020204020204" charset="-122"/>
+              </a:rPr>
+              <a:t>SEED=42），</a:t>
+            </a:r>
+            <a:r>
+              <a:rPr lang="zh-CN" altLang="en-US" sz="2300" b="1">
+                <a:solidFill>
+                  <a:srgbClr val="083B35"/>
+                </a:solidFill>
+                <a:latin typeface="微软雅黑" panose="020B0503020204020204" charset="-122"/>
+                <a:ea typeface="微软雅黑" panose="020B0503020204020204" charset="-122"/>
+              </a:rPr>
+              <a:t>测试集 2417 张独立</a:t>
+            </a:r>
+            <a:endParaRPr lang="zh-CN" altLang="en-US" sz="2300" b="1">
+              <a:solidFill>
+                <a:srgbClr val="083B35"/>
+              </a:solidFill>
+              <a:latin typeface="微软雅黑" panose="020B0503020204020204" charset="-122"/>
+              <a:ea typeface="微软雅黑" panose="020B0503020204020204" charset="-122"/>
+            </a:endParaRPr>
           </a:p>
         </p:txBody>
       </p:sp>
@@ -1578,47 +1721,48 @@
           <p:nvPr/>
         </p:nvSpPr>
         <p:spPr>
-          <a:xfrm xmlns:a="http://schemas.openxmlformats.org/drawingml/2006/main">
+          <a:xfrm>
             <a:off x="720000" y="5184000"/>
             <a:ext cx="10764000" cy="432000"/>
           </a:xfrm>
-          <a:prstGeom xmlns:a="http://schemas.openxmlformats.org/drawingml/2006/main" prst="rect">
-            <a:avLst/>
-          </a:prstGeom>
-        </p:spPr>
-        <p:txBody>
-          <a:bodyPr xmlns:a="http://schemas.openxmlformats.org/drawingml/2006/main" lIns="43200" tIns="43200" rIns="43200" bIns="43200" anchor="ctr">
+          <a:prstGeom prst="rect">
+            <a:avLst/>
+          </a:prstGeom>
+        </p:spPr>
+        <p:txBody>
+          <a:bodyPr lIns="43200" tIns="43200" rIns="43200" bIns="43200" anchor="ctr">
             <a:normAutofit/>
           </a:bodyPr>
-          <a:lstStyle xmlns:a="http://schemas.openxmlformats.org/drawingml/2006/main"/>
-          <a:p xmlns:a="http://schemas.openxmlformats.org/drawingml/2006/main">
+          <a:lstStyle/>
+          <a:p>
             <a:pPr algn="ctr"/>
-            <a:r>
-              <a:rPr lang="zh-CN" sz="1800" b="0">
-                <a:solidFill>
-                  <a:srgbClr val="39545B"/>
-                </a:solidFill>
-                <a:latin typeface="Microsoft YaHei"/>
-                <a:ea typeface="Microsoft YaHei"/>
-              </a:rPr>
-              <a:t>总时长 10 分钟 · 每个数字都要能回到代码、命令或真实样本</a:t>
-            </a:r>
+            <a:endParaRPr lang="zh-CN" sz="1800" b="0">
+              <a:solidFill>
+                <a:srgbClr val="39545B"/>
+              </a:solidFill>
+              <a:latin typeface="微软雅黑" panose="020B0503020204020204" charset="-122"/>
+              <a:ea typeface="微软雅黑" panose="020B0503020204020204" charset="-122"/>
+            </a:endParaRPr>
           </a:p>
         </p:txBody>
       </p:sp>
     </p:spTree>
   </p:cSld>
+  <p:clrMapOvr>
+    <a:masterClrMapping/>
+  </p:clrMapOvr>
 </p:sld>
 </file>
 
 <file path=ppt/slides/slide3.xml><?xml version="1.0" encoding="utf-8"?>
-<p:sld xmlns:p="http://schemas.openxmlformats.org/presentationml/2006/main">
+<p:sld xmlns:a="http://schemas.openxmlformats.org/drawingml/2006/main" xmlns:r="http://schemas.openxmlformats.org/officeDocument/2006/relationships" xmlns:p="http://schemas.openxmlformats.org/presentationml/2006/main">
   <p:cSld>
     <p:bg>
       <p:bgPr>
-        <a:solidFill xmlns:a="http://schemas.openxmlformats.org/drawingml/2006/main">
+        <a:solidFill>
           <a:srgbClr val="F7FBFA"/>
         </a:solidFill>
+        <a:effectLst/>
       </p:bgPr>
     </p:bg>
     <p:spTree>
@@ -1635,31 +1779,38 @@
           <p:nvPr/>
         </p:nvSpPr>
         <p:spPr>
-          <a:xfrm xmlns:a="http://schemas.openxmlformats.org/drawingml/2006/main">
+          <a:xfrm>
             <a:off x="540000" y="252000"/>
             <a:ext cx="5400000" cy="288000"/>
           </a:xfrm>
-          <a:prstGeom xmlns:a="http://schemas.openxmlformats.org/drawingml/2006/main" prst="rect">
-            <a:avLst/>
-          </a:prstGeom>
-        </p:spPr>
-        <p:txBody>
-          <a:bodyPr xmlns:a="http://schemas.openxmlformats.org/drawingml/2006/main" lIns="43200" tIns="43200" rIns="43200" bIns="43200" anchor="ctr">
+          <a:prstGeom prst="rect">
+            <a:avLst/>
+          </a:prstGeom>
+        </p:spPr>
+        <p:txBody>
+          <a:bodyPr lIns="43200" tIns="43200" rIns="43200" bIns="43200" anchor="ctr">
             <a:normAutofit/>
           </a:bodyPr>
-          <a:lstStyle xmlns:a="http://schemas.openxmlformats.org/drawingml/2006/main"/>
-          <a:p xmlns:a="http://schemas.openxmlformats.org/drawingml/2006/main">
+          <a:lstStyle/>
+          <a:p>
             <a:pPr algn="l"/>
             <a:r>
               <a:rPr lang="zh-CN" sz="1400" b="1">
                 <a:solidFill>
                   <a:srgbClr val="028090"/>
                 </a:solidFill>
-                <a:latin typeface="Microsoft YaHei"/>
-                <a:ea typeface="Microsoft YaHei"/>
+                <a:latin typeface="微软雅黑" panose="020B0503020204020204" charset="-122"/>
+                <a:ea typeface="微软雅黑" panose="020B0503020204020204" charset="-122"/>
               </a:rPr>
               <a:t>03 · 75 秒</a:t>
             </a:r>
+            <a:endParaRPr lang="zh-CN" sz="1400" b="1">
+              <a:solidFill>
+                <a:srgbClr val="028090"/>
+              </a:solidFill>
+              <a:latin typeface="微软雅黑" panose="020B0503020204020204" charset="-122"/>
+              <a:ea typeface="微软雅黑" panose="020B0503020204020204" charset="-122"/>
+            </a:endParaRPr>
           </a:p>
         </p:txBody>
       </p:sp>
@@ -1670,31 +1821,38 @@
           <p:nvPr/>
         </p:nvSpPr>
         <p:spPr>
-          <a:xfrm xmlns:a="http://schemas.openxmlformats.org/drawingml/2006/main">
+          <a:xfrm>
             <a:off x="540000" y="558000"/>
             <a:ext cx="10980000" cy="756000"/>
           </a:xfrm>
-          <a:prstGeom xmlns:a="http://schemas.openxmlformats.org/drawingml/2006/main" prst="rect">
-            <a:avLst/>
-          </a:prstGeom>
-        </p:spPr>
-        <p:txBody>
-          <a:bodyPr xmlns:a="http://schemas.openxmlformats.org/drawingml/2006/main" lIns="43200" tIns="43200" rIns="43200" bIns="43200" anchor="ctr">
+          <a:prstGeom prst="rect">
+            <a:avLst/>
+          </a:prstGeom>
+        </p:spPr>
+        <p:txBody>
+          <a:bodyPr lIns="43200" tIns="43200" rIns="43200" bIns="43200" anchor="ctr">
             <a:normAutofit/>
           </a:bodyPr>
-          <a:lstStyle xmlns:a="http://schemas.openxmlformats.org/drawingml/2006/main"/>
-          <a:p xmlns:a="http://schemas.openxmlformats.org/drawingml/2006/main">
+          <a:lstStyle/>
+          <a:p>
             <a:pPr algn="l"/>
             <a:r>
               <a:rPr lang="zh-CN" sz="3800" b="1">
                 <a:solidFill>
                   <a:srgbClr val="183B45"/>
                 </a:solidFill>
-                <a:latin typeface="Microsoft YaHei"/>
-                <a:ea typeface="Microsoft YaHei"/>
+                <a:latin typeface="微软雅黑" panose="020B0503020204020204" charset="-122"/>
+                <a:ea typeface="微软雅黑" panose="020B0503020204020204" charset="-122"/>
               </a:rPr>
               <a:t>端到端系统流程</a:t>
             </a:r>
+            <a:endParaRPr lang="zh-CN" sz="3800" b="1">
+              <a:solidFill>
+                <a:srgbClr val="183B45"/>
+              </a:solidFill>
+              <a:latin typeface="微软雅黑" panose="020B0503020204020204" charset="-122"/>
+              <a:ea typeface="微软雅黑" panose="020B0503020204020204" charset="-122"/>
+            </a:endParaRPr>
           </a:p>
         </p:txBody>
       </p:sp>
@@ -1705,24 +1863,24 @@
           <p:nvPr/>
         </p:nvSpPr>
         <p:spPr>
-          <a:xfrm xmlns:a="http://schemas.openxmlformats.org/drawingml/2006/main">
+          <a:xfrm>
             <a:off x="11232000" y="252000"/>
             <a:ext cx="396000" cy="396000"/>
           </a:xfrm>
-          <a:prstGeom xmlns:a="http://schemas.openxmlformats.org/drawingml/2006/main" prst="ellipse">
-            <a:avLst/>
-          </a:prstGeom>
-          <a:solidFill xmlns:a="http://schemas.openxmlformats.org/drawingml/2006/main">
+          <a:prstGeom prst="ellipse">
+            <a:avLst/>
+          </a:prstGeom>
+          <a:solidFill>
             <a:srgbClr val="02C39A"/>
           </a:solidFill>
-          <a:ln xmlns:a="http://schemas.openxmlformats.org/drawingml/2006/main">
+          <a:ln>
             <a:noFill/>
           </a:ln>
         </p:spPr>
         <p:txBody>
-          <a:bodyPr xmlns:a="http://schemas.openxmlformats.org/drawingml/2006/main"/>
-          <a:lstStyle xmlns:a="http://schemas.openxmlformats.org/drawingml/2006/main"/>
-          <a:p xmlns:a="http://schemas.openxmlformats.org/drawingml/2006/main"/>
+          <a:bodyPr/>
+          <a:lstStyle/>
+          <a:p/>
         </p:txBody>
       </p:sp>
       <p:sp>
@@ -1732,37 +1890,64 @@
           <p:nvPr/>
         </p:nvSpPr>
         <p:spPr>
-          <a:xfrm xmlns:a="http://schemas.openxmlformats.org/drawingml/2006/main">
+          <a:xfrm>
             <a:off x="540000" y="2160000"/>
             <a:ext cx="5292000" cy="2340000"/>
           </a:xfrm>
-          <a:prstGeom xmlns:a="http://schemas.openxmlformats.org/drawingml/2006/main" prst="roundRect">
-            <a:avLst/>
-          </a:prstGeom>
-          <a:solidFill xmlns:a="http://schemas.openxmlformats.org/drawingml/2006/main">
+          <a:prstGeom prst="roundRect">
+            <a:avLst/>
+          </a:prstGeom>
+          <a:solidFill>
             <a:srgbClr val="183B45"/>
           </a:solidFill>
-          <a:ln xmlns:a="http://schemas.openxmlformats.org/drawingml/2006/main">
+          <a:ln>
             <a:noFill/>
           </a:ln>
         </p:spPr>
         <p:txBody>
-          <a:bodyPr xmlns:a="http://schemas.openxmlformats.org/drawingml/2006/main" lIns="90000" tIns="90000" rIns="90000" bIns="90000" anchor="ctr">
+          <a:bodyPr lIns="90000" tIns="90000" rIns="90000" bIns="90000" anchor="ctr">
             <a:normAutofit/>
           </a:bodyPr>
-          <a:lstStyle xmlns:a="http://schemas.openxmlformats.org/drawingml/2006/main"/>
-          <a:p xmlns:a="http://schemas.openxmlformats.org/drawingml/2006/main">
+          <a:lstStyle/>
+          <a:p>
             <a:pPr algn="ctr"/>
             <a:r>
-              <a:rPr lang="zh-CN" sz="2300" b="1">
+              <a:rPr lang="zh-CN" altLang="en-US" sz="2300" b="1">
                 <a:solidFill>
                   <a:srgbClr val="FFFFFF"/>
                 </a:solidFill>
-                <a:latin typeface="Microsoft YaHei"/>
-                <a:ea typeface="Microsoft YaHei"/>
-              </a:rPr>
-              <a:t>输入 → 检查 → 处理</a:t>
-            </a:r>
+                <a:latin typeface="微软雅黑" panose="020B0503020204020204" charset="-122"/>
+                <a:ea typeface="微软雅黑" panose="020B0503020204020204" charset="-122"/>
+              </a:rPr>
+              <a:t>真实输入 → </a:t>
+            </a:r>
+            <a:r>
+              <a:rPr lang="en-US" altLang="zh-CN" sz="2300" b="1">
+                <a:solidFill>
+                  <a:srgbClr val="FFFFFF"/>
+                </a:solidFill>
+                <a:latin typeface="微软雅黑" panose="020B0503020204020204" charset="-122"/>
+                <a:ea typeface="微软雅黑" panose="020B0503020204020204" charset="-122"/>
+              </a:rPr>
+              <a:t>make_split </a:t>
+            </a:r>
+            <a:r>
+              <a:rPr lang="zh-CN" altLang="en-US" sz="2300" b="1">
+                <a:solidFill>
+                  <a:srgbClr val="FFFFFF"/>
+                </a:solidFill>
+                <a:latin typeface="微软雅黑" panose="020B0503020204020204" charset="-122"/>
+                <a:ea typeface="微软雅黑" panose="020B0503020204020204" charset="-122"/>
+              </a:rPr>
+              <a:t>固定 80/20 划分 → 缩到 64×64</a:t>
+            </a:r>
+            <a:endParaRPr lang="zh-CN" altLang="en-US" sz="2300" b="1">
+              <a:solidFill>
+                <a:srgbClr val="FFFFFF"/>
+              </a:solidFill>
+              <a:latin typeface="微软雅黑" panose="020B0503020204020204" charset="-122"/>
+              <a:ea typeface="微软雅黑" panose="020B0503020204020204" charset="-122"/>
+            </a:endParaRPr>
           </a:p>
         </p:txBody>
       </p:sp>
@@ -1773,37 +1958,64 @@
           <p:nvPr/>
         </p:nvSpPr>
         <p:spPr>
-          <a:xfrm xmlns:a="http://schemas.openxmlformats.org/drawingml/2006/main">
+          <a:xfrm>
             <a:off x="6156000" y="2160000"/>
             <a:ext cx="5436000" cy="2340000"/>
           </a:xfrm>
-          <a:prstGeom xmlns:a="http://schemas.openxmlformats.org/drawingml/2006/main" prst="roundRect">
-            <a:avLst/>
-          </a:prstGeom>
-          <a:solidFill xmlns:a="http://schemas.openxmlformats.org/drawingml/2006/main">
+          <a:prstGeom prst="roundRect">
+            <a:avLst/>
+          </a:prstGeom>
+          <a:solidFill>
             <a:srgbClr val="02C39A"/>
           </a:solidFill>
-          <a:ln xmlns:a="http://schemas.openxmlformats.org/drawingml/2006/main">
+          <a:ln>
             <a:noFill/>
           </a:ln>
         </p:spPr>
         <p:txBody>
-          <a:bodyPr xmlns:a="http://schemas.openxmlformats.org/drawingml/2006/main" lIns="90000" tIns="90000" rIns="90000" bIns="90000" anchor="ctr">
+          <a:bodyPr lIns="90000" tIns="90000" rIns="90000" bIns="90000" anchor="ctr">
             <a:normAutofit/>
           </a:bodyPr>
-          <a:lstStyle xmlns:a="http://schemas.openxmlformats.org/drawingml/2006/main"/>
-          <a:p xmlns:a="http://schemas.openxmlformats.org/drawingml/2006/main">
+          <a:lstStyle/>
+          <a:p>
             <a:pPr algn="ctr"/>
             <a:r>
-              <a:rPr lang="zh-CN" sz="2300" b="1">
+              <a:rPr lang="zh-CN" altLang="en-US" sz="2300" b="1">
                 <a:solidFill>
                   <a:srgbClr val="083B35"/>
                 </a:solidFill>
-                <a:latin typeface="Microsoft YaHei"/>
-                <a:ea typeface="Microsoft YaHei"/>
-              </a:rPr>
-              <a:t>基线/候选 → 评估 → 输出</a:t>
-            </a:r>
+                <a:latin typeface="微软雅黑" panose="020B0503020204020204" charset="-122"/>
+                <a:ea typeface="微软雅黑" panose="020B0503020204020204" charset="-122"/>
+              </a:rPr>
+              <a:t>基线(多数类) / 候选(小</a:t>
+            </a:r>
+            <a:r>
+              <a:rPr lang="en-US" altLang="zh-CN" sz="2300" b="1">
+                <a:solidFill>
+                  <a:srgbClr val="083B35"/>
+                </a:solidFill>
+                <a:latin typeface="微软雅黑" panose="020B0503020204020204" charset="-122"/>
+                <a:ea typeface="微软雅黑" panose="020B0503020204020204" charset="-122"/>
+              </a:rPr>
+              <a:t>CNN、</a:t>
+            </a:r>
+            <a:r>
+              <a:rPr lang="zh-CN" altLang="en-US" sz="2300" b="1">
+                <a:solidFill>
+                  <a:srgbClr val="083B35"/>
+                </a:solidFill>
+                <a:latin typeface="微软雅黑" panose="020B0503020204020204" charset="-122"/>
+                <a:ea typeface="微软雅黑" panose="020B0503020204020204" charset="-122"/>
+              </a:rPr>
+              <a:t>迁移学习) → 评估(测试集2417张) → 输出</a:t>
+            </a:r>
+            <a:endParaRPr lang="zh-CN" altLang="en-US" sz="2300" b="1">
+              <a:solidFill>
+                <a:srgbClr val="083B35"/>
+              </a:solidFill>
+              <a:latin typeface="微软雅黑" panose="020B0503020204020204" charset="-122"/>
+              <a:ea typeface="微软雅黑" panose="020B0503020204020204" charset="-122"/>
+            </a:endParaRPr>
           </a:p>
         </p:txBody>
       </p:sp>
@@ -1814,47 +2026,48 @@
           <p:nvPr/>
         </p:nvSpPr>
         <p:spPr>
-          <a:xfrm xmlns:a="http://schemas.openxmlformats.org/drawingml/2006/main">
+          <a:xfrm>
             <a:off x="720000" y="5184000"/>
             <a:ext cx="10764000" cy="432000"/>
           </a:xfrm>
-          <a:prstGeom xmlns:a="http://schemas.openxmlformats.org/drawingml/2006/main" prst="rect">
-            <a:avLst/>
-          </a:prstGeom>
-        </p:spPr>
-        <p:txBody>
-          <a:bodyPr xmlns:a="http://schemas.openxmlformats.org/drawingml/2006/main" lIns="43200" tIns="43200" rIns="43200" bIns="43200" anchor="ctr">
+          <a:prstGeom prst="rect">
+            <a:avLst/>
+          </a:prstGeom>
+        </p:spPr>
+        <p:txBody>
+          <a:bodyPr lIns="43200" tIns="43200" rIns="43200" bIns="43200" anchor="ctr">
             <a:normAutofit/>
           </a:bodyPr>
-          <a:lstStyle xmlns:a="http://schemas.openxmlformats.org/drawingml/2006/main"/>
-          <a:p xmlns:a="http://schemas.openxmlformats.org/drawingml/2006/main">
+          <a:lstStyle/>
+          <a:p>
             <a:pPr algn="ctr"/>
-            <a:r>
-              <a:rPr lang="zh-CN" sz="1800" b="0">
-                <a:solidFill>
-                  <a:srgbClr val="39545B"/>
-                </a:solidFill>
-                <a:latin typeface="Microsoft YaHei"/>
-                <a:ea typeface="Microsoft YaHei"/>
-              </a:rPr>
-              <a:t>总时长 10 分钟 · 每个数字都要能回到代码、命令或真实样本</a:t>
-            </a:r>
+            <a:endParaRPr lang="zh-CN" sz="1800" b="0">
+              <a:solidFill>
+                <a:srgbClr val="39545B"/>
+              </a:solidFill>
+              <a:latin typeface="微软雅黑" panose="020B0503020204020204" charset="-122"/>
+              <a:ea typeface="微软雅黑" panose="020B0503020204020204" charset="-122"/>
+            </a:endParaRPr>
           </a:p>
         </p:txBody>
       </p:sp>
     </p:spTree>
   </p:cSld>
+  <p:clrMapOvr>
+    <a:masterClrMapping/>
+  </p:clrMapOvr>
 </p:sld>
 </file>
 
 <file path=ppt/slides/slide4.xml><?xml version="1.0" encoding="utf-8"?>
-<p:sld xmlns:p="http://schemas.openxmlformats.org/presentationml/2006/main">
+<p:sld xmlns:a="http://schemas.openxmlformats.org/drawingml/2006/main" xmlns:r="http://schemas.openxmlformats.org/officeDocument/2006/relationships" xmlns:p="http://schemas.openxmlformats.org/presentationml/2006/main">
   <p:cSld>
     <p:bg>
       <p:bgPr>
-        <a:solidFill xmlns:a="http://schemas.openxmlformats.org/drawingml/2006/main">
+        <a:solidFill>
           <a:srgbClr val="F7FBFA"/>
         </a:solidFill>
+        <a:effectLst/>
       </p:bgPr>
     </p:bg>
     <p:spTree>
@@ -1871,31 +2084,38 @@
           <p:nvPr/>
         </p:nvSpPr>
         <p:spPr>
-          <a:xfrm xmlns:a="http://schemas.openxmlformats.org/drawingml/2006/main">
+          <a:xfrm>
             <a:off x="540000" y="252000"/>
             <a:ext cx="5400000" cy="288000"/>
           </a:xfrm>
-          <a:prstGeom xmlns:a="http://schemas.openxmlformats.org/drawingml/2006/main" prst="rect">
-            <a:avLst/>
-          </a:prstGeom>
-        </p:spPr>
-        <p:txBody>
-          <a:bodyPr xmlns:a="http://schemas.openxmlformats.org/drawingml/2006/main" lIns="43200" tIns="43200" rIns="43200" bIns="43200" anchor="ctr">
+          <a:prstGeom prst="rect">
+            <a:avLst/>
+          </a:prstGeom>
+        </p:spPr>
+        <p:txBody>
+          <a:bodyPr lIns="43200" tIns="43200" rIns="43200" bIns="43200" anchor="ctr">
             <a:normAutofit/>
           </a:bodyPr>
-          <a:lstStyle xmlns:a="http://schemas.openxmlformats.org/drawingml/2006/main"/>
-          <a:p xmlns:a="http://schemas.openxmlformats.org/drawingml/2006/main">
+          <a:lstStyle/>
+          <a:p>
             <a:pPr algn="l"/>
             <a:r>
               <a:rPr lang="zh-CN" sz="1400" b="1">
                 <a:solidFill>
                   <a:srgbClr val="028090"/>
                 </a:solidFill>
-                <a:latin typeface="Microsoft YaHei"/>
-                <a:ea typeface="Microsoft YaHei"/>
+                <a:latin typeface="微软雅黑" panose="020B0503020204020204" charset="-122"/>
+                <a:ea typeface="微软雅黑" panose="020B0503020204020204" charset="-122"/>
               </a:rPr>
               <a:t>04 · 90 秒</a:t>
             </a:r>
+            <a:endParaRPr lang="zh-CN" sz="1400" b="1">
+              <a:solidFill>
+                <a:srgbClr val="028090"/>
+              </a:solidFill>
+              <a:latin typeface="微软雅黑" panose="020B0503020204020204" charset="-122"/>
+              <a:ea typeface="微软雅黑" panose="020B0503020204020204" charset="-122"/>
+            </a:endParaRPr>
           </a:p>
         </p:txBody>
       </p:sp>
@@ -1906,31 +2126,38 @@
           <p:nvPr/>
         </p:nvSpPr>
         <p:spPr>
-          <a:xfrm xmlns:a="http://schemas.openxmlformats.org/drawingml/2006/main">
+          <a:xfrm>
             <a:off x="540000" y="558000"/>
             <a:ext cx="10980000" cy="756000"/>
           </a:xfrm>
-          <a:prstGeom xmlns:a="http://schemas.openxmlformats.org/drawingml/2006/main" prst="rect">
-            <a:avLst/>
-          </a:prstGeom>
-        </p:spPr>
-        <p:txBody>
-          <a:bodyPr xmlns:a="http://schemas.openxmlformats.org/drawingml/2006/main" lIns="43200" tIns="43200" rIns="43200" bIns="43200" anchor="ctr">
+          <a:prstGeom prst="rect">
+            <a:avLst/>
+          </a:prstGeom>
+        </p:spPr>
+        <p:txBody>
+          <a:bodyPr lIns="43200" tIns="43200" rIns="43200" bIns="43200" anchor="ctr">
             <a:normAutofit/>
           </a:bodyPr>
-          <a:lstStyle xmlns:a="http://schemas.openxmlformats.org/drawingml/2006/main"/>
-          <a:p xmlns:a="http://schemas.openxmlformats.org/drawingml/2006/main">
+          <a:lstStyle/>
+          <a:p>
             <a:pPr algn="l"/>
             <a:r>
               <a:rPr lang="zh-CN" sz="3800" b="1">
                 <a:solidFill>
                   <a:srgbClr val="183B45"/>
                 </a:solidFill>
-                <a:latin typeface="Microsoft YaHei"/>
-                <a:ea typeface="Microsoft YaHei"/>
+                <a:latin typeface="微软雅黑" panose="020B0503020204020204" charset="-122"/>
+                <a:ea typeface="微软雅黑" panose="020B0503020204020204" charset="-122"/>
               </a:rPr>
               <a:t>简单基线与候选</a:t>
             </a:r>
+            <a:endParaRPr lang="zh-CN" sz="3800" b="1">
+              <a:solidFill>
+                <a:srgbClr val="183B45"/>
+              </a:solidFill>
+              <a:latin typeface="微软雅黑" panose="020B0503020204020204" charset="-122"/>
+              <a:ea typeface="微软雅黑" panose="020B0503020204020204" charset="-122"/>
+            </a:endParaRPr>
           </a:p>
         </p:txBody>
       </p:sp>
@@ -1941,24 +2168,24 @@
           <p:nvPr/>
         </p:nvSpPr>
         <p:spPr>
-          <a:xfrm xmlns:a="http://schemas.openxmlformats.org/drawingml/2006/main">
+          <a:xfrm>
             <a:off x="11232000" y="252000"/>
             <a:ext cx="396000" cy="396000"/>
           </a:xfrm>
-          <a:prstGeom xmlns:a="http://schemas.openxmlformats.org/drawingml/2006/main" prst="ellipse">
-            <a:avLst/>
-          </a:prstGeom>
-          <a:solidFill xmlns:a="http://schemas.openxmlformats.org/drawingml/2006/main">
+          <a:prstGeom prst="ellipse">
+            <a:avLst/>
+          </a:prstGeom>
+          <a:solidFill>
             <a:srgbClr val="02C39A"/>
           </a:solidFill>
-          <a:ln xmlns:a="http://schemas.openxmlformats.org/drawingml/2006/main">
+          <a:ln>
             <a:noFill/>
           </a:ln>
         </p:spPr>
         <p:txBody>
-          <a:bodyPr xmlns:a="http://schemas.openxmlformats.org/drawingml/2006/main"/>
-          <a:lstStyle xmlns:a="http://schemas.openxmlformats.org/drawingml/2006/main"/>
-          <a:p xmlns:a="http://schemas.openxmlformats.org/drawingml/2006/main"/>
+          <a:bodyPr/>
+          <a:lstStyle/>
+          <a:p/>
         </p:txBody>
       </p:sp>
       <p:sp>
@@ -1968,37 +2195,44 @@
           <p:nvPr/>
         </p:nvSpPr>
         <p:spPr>
-          <a:xfrm xmlns:a="http://schemas.openxmlformats.org/drawingml/2006/main">
+          <a:xfrm>
             <a:off x="540000" y="2160000"/>
             <a:ext cx="5292000" cy="2340000"/>
           </a:xfrm>
-          <a:prstGeom xmlns:a="http://schemas.openxmlformats.org/drawingml/2006/main" prst="roundRect">
-            <a:avLst/>
-          </a:prstGeom>
-          <a:solidFill xmlns:a="http://schemas.openxmlformats.org/drawingml/2006/main">
+          <a:prstGeom prst="roundRect">
+            <a:avLst/>
+          </a:prstGeom>
+          <a:solidFill>
             <a:srgbClr val="183B45"/>
           </a:solidFill>
-          <a:ln xmlns:a="http://schemas.openxmlformats.org/drawingml/2006/main">
+          <a:ln>
             <a:noFill/>
           </a:ln>
         </p:spPr>
         <p:txBody>
-          <a:bodyPr xmlns:a="http://schemas.openxmlformats.org/drawingml/2006/main" lIns="90000" tIns="90000" rIns="90000" bIns="90000" anchor="ctr">
+          <a:bodyPr lIns="90000" tIns="90000" rIns="90000" bIns="90000" anchor="ctr">
             <a:normAutofit/>
           </a:bodyPr>
-          <a:lstStyle xmlns:a="http://schemas.openxmlformats.org/drawingml/2006/main"/>
-          <a:p xmlns:a="http://schemas.openxmlformats.org/drawingml/2006/main">
+          <a:lstStyle/>
+          <a:p>
             <a:pPr algn="ctr"/>
             <a:r>
-              <a:rPr lang="zh-CN" sz="2300" b="1">
+              <a:rPr lang="zh-CN" altLang="en-US" sz="2300" b="1">
                 <a:solidFill>
                   <a:srgbClr val="FFFFFF"/>
                 </a:solidFill>
-                <a:latin typeface="Microsoft YaHei"/>
-                <a:ea typeface="Microsoft YaHei"/>
-              </a:rPr>
-              <a:t>基线：最低比较</a:t>
-            </a:r>
+                <a:latin typeface="微软雅黑" panose="020B0503020204020204" charset="-122"/>
+                <a:ea typeface="微软雅黑" panose="020B0503020204020204" charset="-122"/>
+              </a:rPr>
+              <a:t>基线：多数类（全猜厨余）0.4261</a:t>
+            </a:r>
+            <a:endParaRPr lang="zh-CN" altLang="en-US" sz="2300" b="1">
+              <a:solidFill>
+                <a:srgbClr val="FFFFFF"/>
+              </a:solidFill>
+              <a:latin typeface="微软雅黑" panose="020B0503020204020204" charset="-122"/>
+              <a:ea typeface="微软雅黑" panose="020B0503020204020204" charset="-122"/>
+            </a:endParaRPr>
           </a:p>
         </p:txBody>
       </p:sp>
@@ -2009,37 +2243,104 @@
           <p:nvPr/>
         </p:nvSpPr>
         <p:spPr>
-          <a:xfrm xmlns:a="http://schemas.openxmlformats.org/drawingml/2006/main">
+          <a:xfrm>
             <a:off x="6156000" y="2160000"/>
             <a:ext cx="5436000" cy="2340000"/>
           </a:xfrm>
-          <a:prstGeom xmlns:a="http://schemas.openxmlformats.org/drawingml/2006/main" prst="roundRect">
-            <a:avLst/>
-          </a:prstGeom>
-          <a:solidFill xmlns:a="http://schemas.openxmlformats.org/drawingml/2006/main">
+          <a:prstGeom prst="roundRect">
+            <a:avLst/>
+          </a:prstGeom>
+          <a:solidFill>
             <a:srgbClr val="02C39A"/>
           </a:solidFill>
-          <a:ln xmlns:a="http://schemas.openxmlformats.org/drawingml/2006/main">
+          <a:ln>
             <a:noFill/>
           </a:ln>
         </p:spPr>
         <p:txBody>
-          <a:bodyPr xmlns:a="http://schemas.openxmlformats.org/drawingml/2006/main" lIns="90000" tIns="90000" rIns="90000" bIns="90000" anchor="ctr">
+          <a:bodyPr lIns="90000" tIns="90000" rIns="90000" bIns="90000" anchor="ctr">
             <a:normAutofit/>
           </a:bodyPr>
-          <a:lstStyle xmlns:a="http://schemas.openxmlformats.org/drawingml/2006/main"/>
-          <a:p xmlns:a="http://schemas.openxmlformats.org/drawingml/2006/main">
+          <a:lstStyle/>
+          <a:p>
             <a:pPr algn="ctr"/>
             <a:r>
-              <a:rPr lang="zh-CN" sz="2300" b="1">
+              <a:rPr lang="zh-CN" altLang="en-US" sz="2300" b="1">
                 <a:solidFill>
                   <a:srgbClr val="083B35"/>
                 </a:solidFill>
-                <a:latin typeface="Microsoft YaHei"/>
-                <a:ea typeface="Microsoft YaHei"/>
-              </a:rPr>
-              <a:t>候选：只复杂一步</a:t>
-            </a:r>
+                <a:latin typeface="微软雅黑" panose="020B0503020204020204" charset="-122"/>
+                <a:ea typeface="微软雅黑" panose="020B0503020204020204" charset="-122"/>
+              </a:rPr>
+              <a:t>候选一：小 </a:t>
+            </a:r>
+            <a:r>
+              <a:rPr lang="en-US" altLang="zh-CN" sz="2300" b="1">
+                <a:solidFill>
+                  <a:srgbClr val="083B35"/>
+                </a:solidFill>
+                <a:latin typeface="微软雅黑" panose="020B0503020204020204" charset="-122"/>
+                <a:ea typeface="微软雅黑" panose="020B0503020204020204" charset="-122"/>
+              </a:rPr>
+              <a:t>CNN（</a:t>
+            </a:r>
+            <a:r>
+              <a:rPr lang="zh-CN" altLang="en-US" sz="2300" b="1">
+                <a:solidFill>
+                  <a:srgbClr val="083B35"/>
+                </a:solidFill>
+                <a:latin typeface="微软雅黑" panose="020B0503020204020204" charset="-122"/>
+                <a:ea typeface="微软雅黑" panose="020B0503020204020204" charset="-122"/>
+              </a:rPr>
+              <a:t>从零训练）0.6268</a:t>
+            </a:r>
+            <a:endParaRPr lang="zh-CN" altLang="en-US" sz="2300" b="1">
+              <a:solidFill>
+                <a:srgbClr val="083B35"/>
+              </a:solidFill>
+              <a:latin typeface="微软雅黑" panose="020B0503020204020204" charset="-122"/>
+              <a:ea typeface="微软雅黑" panose="020B0503020204020204" charset="-122"/>
+            </a:endParaRPr>
+          </a:p>
+          <a:p>
+            <a:pPr algn="ctr"/>
+            <a:r>
+              <a:rPr lang="zh-CN" altLang="en-US" sz="2300" b="1">
+                <a:solidFill>
+                  <a:srgbClr val="083B35"/>
+                </a:solidFill>
+                <a:latin typeface="微软雅黑" panose="020B0503020204020204" charset="-122"/>
+                <a:ea typeface="微软雅黑" panose="020B0503020204020204" charset="-122"/>
+              </a:rPr>
+              <a:t>候选二：迁移学习（预训练 </a:t>
+            </a:r>
+            <a:r>
+              <a:rPr lang="en-US" altLang="zh-CN" sz="2300" b="1">
+                <a:solidFill>
+                  <a:srgbClr val="083B35"/>
+                </a:solidFill>
+                <a:latin typeface="微软雅黑" panose="020B0503020204020204" charset="-122"/>
+                <a:ea typeface="微软雅黑" panose="020B0503020204020204" charset="-122"/>
+              </a:rPr>
+              <a:t>ResNet18 </a:t>
+            </a:r>
+            <a:r>
+              <a:rPr lang="zh-CN" altLang="en-US" sz="2300" b="1">
+                <a:solidFill>
+                  <a:srgbClr val="083B35"/>
+                </a:solidFill>
+                <a:latin typeface="微软雅黑" panose="020B0503020204020204" charset="-122"/>
+                <a:ea typeface="微软雅黑" panose="020B0503020204020204" charset="-122"/>
+              </a:rPr>
+              <a:t>冻结 + 线性分类器）0.8858</a:t>
+            </a:r>
+            <a:endParaRPr lang="zh-CN" altLang="en-US" sz="2300" b="1">
+              <a:solidFill>
+                <a:srgbClr val="083B35"/>
+              </a:solidFill>
+              <a:latin typeface="微软雅黑" panose="020B0503020204020204" charset="-122"/>
+              <a:ea typeface="微软雅黑" panose="020B0503020204020204" charset="-122"/>
+            </a:endParaRPr>
           </a:p>
         </p:txBody>
       </p:sp>
@@ -2050,47 +2351,48 @@
           <p:nvPr/>
         </p:nvSpPr>
         <p:spPr>
-          <a:xfrm xmlns:a="http://schemas.openxmlformats.org/drawingml/2006/main">
+          <a:xfrm>
             <a:off x="720000" y="5184000"/>
             <a:ext cx="10764000" cy="432000"/>
           </a:xfrm>
-          <a:prstGeom xmlns:a="http://schemas.openxmlformats.org/drawingml/2006/main" prst="rect">
-            <a:avLst/>
-          </a:prstGeom>
-        </p:spPr>
-        <p:txBody>
-          <a:bodyPr xmlns:a="http://schemas.openxmlformats.org/drawingml/2006/main" lIns="43200" tIns="43200" rIns="43200" bIns="43200" anchor="ctr">
+          <a:prstGeom prst="rect">
+            <a:avLst/>
+          </a:prstGeom>
+        </p:spPr>
+        <p:txBody>
+          <a:bodyPr lIns="43200" tIns="43200" rIns="43200" bIns="43200" anchor="ctr">
             <a:normAutofit/>
           </a:bodyPr>
-          <a:lstStyle xmlns:a="http://schemas.openxmlformats.org/drawingml/2006/main"/>
-          <a:p xmlns:a="http://schemas.openxmlformats.org/drawingml/2006/main">
+          <a:lstStyle/>
+          <a:p>
             <a:pPr algn="ctr"/>
-            <a:r>
-              <a:rPr lang="zh-CN" sz="1800" b="0">
-                <a:solidFill>
-                  <a:srgbClr val="39545B"/>
-                </a:solidFill>
-                <a:latin typeface="Microsoft YaHei"/>
-                <a:ea typeface="Microsoft YaHei"/>
-              </a:rPr>
-              <a:t>总时长 10 分钟 · 每个数字都要能回到代码、命令或真实样本</a:t>
-            </a:r>
+            <a:endParaRPr lang="zh-CN" sz="1800" b="0">
+              <a:solidFill>
+                <a:srgbClr val="39545B"/>
+              </a:solidFill>
+              <a:latin typeface="微软雅黑" panose="020B0503020204020204" charset="-122"/>
+              <a:ea typeface="微软雅黑" panose="020B0503020204020204" charset="-122"/>
+            </a:endParaRPr>
           </a:p>
         </p:txBody>
       </p:sp>
     </p:spTree>
   </p:cSld>
+  <p:clrMapOvr>
+    <a:masterClrMapping/>
+  </p:clrMapOvr>
 </p:sld>
 </file>
 
 <file path=ppt/slides/slide5.xml><?xml version="1.0" encoding="utf-8"?>
-<p:sld xmlns:p="http://schemas.openxmlformats.org/presentationml/2006/main">
+<p:sld xmlns:a="http://schemas.openxmlformats.org/drawingml/2006/main" xmlns:r="http://schemas.openxmlformats.org/officeDocument/2006/relationships" xmlns:p="http://schemas.openxmlformats.org/presentationml/2006/main">
   <p:cSld>
     <p:bg>
       <p:bgPr>
-        <a:solidFill xmlns:a="http://schemas.openxmlformats.org/drawingml/2006/main">
+        <a:solidFill>
           <a:srgbClr val="F7FBFA"/>
         </a:solidFill>
+        <a:effectLst/>
       </p:bgPr>
     </p:bg>
     <p:spTree>
@@ -2107,31 +2409,38 @@
           <p:nvPr/>
         </p:nvSpPr>
         <p:spPr>
-          <a:xfrm xmlns:a="http://schemas.openxmlformats.org/drawingml/2006/main">
+          <a:xfrm>
             <a:off x="540000" y="252000"/>
             <a:ext cx="5400000" cy="288000"/>
           </a:xfrm>
-          <a:prstGeom xmlns:a="http://schemas.openxmlformats.org/drawingml/2006/main" prst="rect">
-            <a:avLst/>
-          </a:prstGeom>
-        </p:spPr>
-        <p:txBody>
-          <a:bodyPr xmlns:a="http://schemas.openxmlformats.org/drawingml/2006/main" lIns="43200" tIns="43200" rIns="43200" bIns="43200" anchor="ctr">
+          <a:prstGeom prst="rect">
+            <a:avLst/>
+          </a:prstGeom>
+        </p:spPr>
+        <p:txBody>
+          <a:bodyPr lIns="43200" tIns="43200" rIns="43200" bIns="43200" anchor="ctr">
             <a:normAutofit/>
           </a:bodyPr>
-          <a:lstStyle xmlns:a="http://schemas.openxmlformats.org/drawingml/2006/main"/>
-          <a:p xmlns:a="http://schemas.openxmlformats.org/drawingml/2006/main">
+          <a:lstStyle/>
+          <a:p>
             <a:pPr algn="l"/>
             <a:r>
               <a:rPr lang="zh-CN" sz="1400" b="1">
                 <a:solidFill>
                   <a:srgbClr val="028090"/>
                 </a:solidFill>
-                <a:latin typeface="Microsoft YaHei"/>
-                <a:ea typeface="Microsoft YaHei"/>
+                <a:latin typeface="微软雅黑" panose="020B0503020204020204" charset="-122"/>
+                <a:ea typeface="微软雅黑" panose="020B0503020204020204" charset="-122"/>
               </a:rPr>
               <a:t>05 · 90 秒</a:t>
             </a:r>
+            <a:endParaRPr lang="zh-CN" sz="1400" b="1">
+              <a:solidFill>
+                <a:srgbClr val="028090"/>
+              </a:solidFill>
+              <a:latin typeface="微软雅黑" panose="020B0503020204020204" charset="-122"/>
+              <a:ea typeface="微软雅黑" panose="020B0503020204020204" charset="-122"/>
+            </a:endParaRPr>
           </a:p>
         </p:txBody>
       </p:sp>
@@ -2142,31 +2451,38 @@
           <p:nvPr/>
         </p:nvSpPr>
         <p:spPr>
-          <a:xfrm xmlns:a="http://schemas.openxmlformats.org/drawingml/2006/main">
+          <a:xfrm>
             <a:off x="540000" y="558000"/>
             <a:ext cx="10980000" cy="756000"/>
           </a:xfrm>
-          <a:prstGeom xmlns:a="http://schemas.openxmlformats.org/drawingml/2006/main" prst="rect">
-            <a:avLst/>
-          </a:prstGeom>
-        </p:spPr>
-        <p:txBody>
-          <a:bodyPr xmlns:a="http://schemas.openxmlformats.org/drawingml/2006/main" lIns="43200" tIns="43200" rIns="43200" bIns="43200" anchor="ctr">
+          <a:prstGeom prst="rect">
+            <a:avLst/>
+          </a:prstGeom>
+        </p:spPr>
+        <p:txBody>
+          <a:bodyPr lIns="43200" tIns="43200" rIns="43200" bIns="43200" anchor="ctr">
             <a:normAutofit/>
           </a:bodyPr>
-          <a:lstStyle xmlns:a="http://schemas.openxmlformats.org/drawingml/2006/main"/>
-          <a:p xmlns:a="http://schemas.openxmlformats.org/drawingml/2006/main">
+          <a:lstStyle/>
+          <a:p>
             <a:pPr algn="l"/>
             <a:r>
               <a:rPr lang="zh-CN" sz="3800" b="1">
                 <a:solidFill>
                   <a:srgbClr val="183B45"/>
                 </a:solidFill>
-                <a:latin typeface="Microsoft YaHei"/>
-                <a:ea typeface="Microsoft YaHei"/>
+                <a:latin typeface="微软雅黑" panose="020B0503020204020204" charset="-122"/>
+                <a:ea typeface="微软雅黑" panose="020B0503020204020204" charset="-122"/>
               </a:rPr>
               <a:t>同一条件下的结果</a:t>
             </a:r>
+            <a:endParaRPr lang="zh-CN" sz="3800" b="1">
+              <a:solidFill>
+                <a:srgbClr val="183B45"/>
+              </a:solidFill>
+              <a:latin typeface="微软雅黑" panose="020B0503020204020204" charset="-122"/>
+              <a:ea typeface="微软雅黑" panose="020B0503020204020204" charset="-122"/>
+            </a:endParaRPr>
           </a:p>
         </p:txBody>
       </p:sp>
@@ -2177,24 +2493,24 @@
           <p:nvPr/>
         </p:nvSpPr>
         <p:spPr>
-          <a:xfrm xmlns:a="http://schemas.openxmlformats.org/drawingml/2006/main">
+          <a:xfrm>
             <a:off x="11232000" y="252000"/>
             <a:ext cx="396000" cy="396000"/>
           </a:xfrm>
-          <a:prstGeom xmlns:a="http://schemas.openxmlformats.org/drawingml/2006/main" prst="ellipse">
-            <a:avLst/>
-          </a:prstGeom>
-          <a:solidFill xmlns:a="http://schemas.openxmlformats.org/drawingml/2006/main">
+          <a:prstGeom prst="ellipse">
+            <a:avLst/>
+          </a:prstGeom>
+          <a:solidFill>
             <a:srgbClr val="02C39A"/>
           </a:solidFill>
-          <a:ln xmlns:a="http://schemas.openxmlformats.org/drawingml/2006/main">
+          <a:ln>
             <a:noFill/>
           </a:ln>
         </p:spPr>
         <p:txBody>
-          <a:bodyPr xmlns:a="http://schemas.openxmlformats.org/drawingml/2006/main"/>
-          <a:lstStyle xmlns:a="http://schemas.openxmlformats.org/drawingml/2006/main"/>
-          <a:p xmlns:a="http://schemas.openxmlformats.org/drawingml/2006/main"/>
+          <a:bodyPr/>
+          <a:lstStyle/>
+          <a:p/>
         </p:txBody>
       </p:sp>
       <p:sp>
@@ -2204,37 +2520,44 @@
           <p:nvPr/>
         </p:nvSpPr>
         <p:spPr>
-          <a:xfrm xmlns:a="http://schemas.openxmlformats.org/drawingml/2006/main">
+          <a:xfrm>
             <a:off x="540000" y="2160000"/>
             <a:ext cx="5292000" cy="2340000"/>
           </a:xfrm>
-          <a:prstGeom xmlns:a="http://schemas.openxmlformats.org/drawingml/2006/main" prst="roundRect">
-            <a:avLst/>
-          </a:prstGeom>
-          <a:solidFill xmlns:a="http://schemas.openxmlformats.org/drawingml/2006/main">
+          <a:prstGeom prst="roundRect">
+            <a:avLst/>
+          </a:prstGeom>
+          <a:solidFill>
             <a:srgbClr val="183B45"/>
           </a:solidFill>
-          <a:ln xmlns:a="http://schemas.openxmlformats.org/drawingml/2006/main">
+          <a:ln>
             <a:noFill/>
           </a:ln>
         </p:spPr>
         <p:txBody>
-          <a:bodyPr xmlns:a="http://schemas.openxmlformats.org/drawingml/2006/main" lIns="90000" tIns="90000" rIns="90000" bIns="90000" anchor="ctr">
+          <a:bodyPr lIns="90000" tIns="90000" rIns="90000" bIns="90000" anchor="ctr">
             <a:normAutofit/>
           </a:bodyPr>
-          <a:lstStyle xmlns:a="http://schemas.openxmlformats.org/drawingml/2006/main"/>
-          <a:p xmlns:a="http://schemas.openxmlformats.org/drawingml/2006/main">
+          <a:lstStyle/>
+          <a:p>
             <a:pPr algn="ctr"/>
             <a:r>
-              <a:rPr lang="zh-CN" sz="2300" b="1">
+              <a:rPr lang="zh-CN" altLang="en-US" sz="2300" b="1">
                 <a:solidFill>
                   <a:srgbClr val="FFFFFF"/>
                 </a:solidFill>
-                <a:latin typeface="Microsoft YaHei"/>
-                <a:ea typeface="Microsoft YaHei"/>
-              </a:rPr>
-              <a:t>主指标与使用者含义</a:t>
-            </a:r>
+                <a:latin typeface="微软雅黑" panose="020B0503020204020204" charset="-122"/>
+                <a:ea typeface="微软雅黑" panose="020B0503020204020204" charset="-122"/>
+              </a:rPr>
+              <a:t>左框：同一测试集 2417 张——基线 0.4261 / 候选一 0.6268 / 候选二 0.8858</a:t>
+            </a:r>
+            <a:endParaRPr lang="zh-CN" altLang="en-US" sz="2300" b="1">
+              <a:solidFill>
+                <a:srgbClr val="FFFFFF"/>
+              </a:solidFill>
+              <a:latin typeface="微软雅黑" panose="020B0503020204020204" charset="-122"/>
+              <a:ea typeface="微软雅黑" panose="020B0503020204020204" charset="-122"/>
+            </a:endParaRPr>
           </a:p>
         </p:txBody>
       </p:sp>
@@ -2245,37 +2568,44 @@
           <p:nvPr/>
         </p:nvSpPr>
         <p:spPr>
-          <a:xfrm xmlns:a="http://schemas.openxmlformats.org/drawingml/2006/main">
+          <a:xfrm>
             <a:off x="6156000" y="2160000"/>
             <a:ext cx="5436000" cy="2340000"/>
           </a:xfrm>
-          <a:prstGeom xmlns:a="http://schemas.openxmlformats.org/drawingml/2006/main" prst="roundRect">
-            <a:avLst/>
-          </a:prstGeom>
-          <a:solidFill xmlns:a="http://schemas.openxmlformats.org/drawingml/2006/main">
+          <a:prstGeom prst="roundRect">
+            <a:avLst/>
+          </a:prstGeom>
+          <a:solidFill>
             <a:srgbClr val="02C39A"/>
           </a:solidFill>
-          <a:ln xmlns:a="http://schemas.openxmlformats.org/drawingml/2006/main">
+          <a:ln>
             <a:noFill/>
           </a:ln>
         </p:spPr>
         <p:txBody>
-          <a:bodyPr xmlns:a="http://schemas.openxmlformats.org/drawingml/2006/main" lIns="90000" tIns="90000" rIns="90000" bIns="90000" anchor="ctr">
+          <a:bodyPr lIns="90000" tIns="90000" rIns="90000" bIns="90000" anchor="ctr">
             <a:normAutofit/>
           </a:bodyPr>
-          <a:lstStyle xmlns:a="http://schemas.openxmlformats.org/drawingml/2006/main"/>
-          <a:p xmlns:a="http://schemas.openxmlformats.org/drawingml/2006/main">
+          <a:lstStyle/>
+          <a:p>
             <a:pPr algn="ctr"/>
             <a:r>
-              <a:rPr lang="zh-CN" sz="2300" b="1">
+              <a:rPr lang="zh-CN" altLang="en-US" sz="2300" b="1">
                 <a:solidFill>
                   <a:srgbClr val="083B35"/>
                 </a:solidFill>
-                <a:latin typeface="Microsoft YaHei"/>
-                <a:ea typeface="Microsoft YaHei"/>
-              </a:rPr>
-              <a:t>重要错误与不确定性</a:t>
-            </a:r>
+                <a:latin typeface="微软雅黑" panose="020B0503020204020204" charset="-122"/>
+                <a:ea typeface="微软雅黑" panose="020B0503020204020204" charset="-122"/>
+              </a:rPr>
+              <a:t>每类准确率(候选二)——厨余 0.96、有害 0.89、其他 0.81、可回收 0.80</a:t>
+            </a:r>
+            <a:endParaRPr lang="zh-CN" altLang="en-US" sz="2300" b="1">
+              <a:solidFill>
+                <a:srgbClr val="083B35"/>
+              </a:solidFill>
+              <a:latin typeface="微软雅黑" panose="020B0503020204020204" charset="-122"/>
+              <a:ea typeface="微软雅黑" panose="020B0503020204020204" charset="-122"/>
+            </a:endParaRPr>
           </a:p>
         </p:txBody>
       </p:sp>
@@ -2286,47 +2616,48 @@
           <p:nvPr/>
         </p:nvSpPr>
         <p:spPr>
-          <a:xfrm xmlns:a="http://schemas.openxmlformats.org/drawingml/2006/main">
+          <a:xfrm>
             <a:off x="720000" y="5184000"/>
             <a:ext cx="10764000" cy="432000"/>
           </a:xfrm>
-          <a:prstGeom xmlns:a="http://schemas.openxmlformats.org/drawingml/2006/main" prst="rect">
-            <a:avLst/>
-          </a:prstGeom>
-        </p:spPr>
-        <p:txBody>
-          <a:bodyPr xmlns:a="http://schemas.openxmlformats.org/drawingml/2006/main" lIns="43200" tIns="43200" rIns="43200" bIns="43200" anchor="ctr">
+          <a:prstGeom prst="rect">
+            <a:avLst/>
+          </a:prstGeom>
+        </p:spPr>
+        <p:txBody>
+          <a:bodyPr lIns="43200" tIns="43200" rIns="43200" bIns="43200" anchor="ctr">
             <a:normAutofit/>
           </a:bodyPr>
-          <a:lstStyle xmlns:a="http://schemas.openxmlformats.org/drawingml/2006/main"/>
-          <a:p xmlns:a="http://schemas.openxmlformats.org/drawingml/2006/main">
+          <a:lstStyle/>
+          <a:p>
             <a:pPr algn="ctr"/>
-            <a:r>
-              <a:rPr lang="zh-CN" sz="1800" b="0">
-                <a:solidFill>
-                  <a:srgbClr val="39545B"/>
-                </a:solidFill>
-                <a:latin typeface="Microsoft YaHei"/>
-                <a:ea typeface="Microsoft YaHei"/>
-              </a:rPr>
-              <a:t>总时长 10 分钟 · 每个数字都要能回到代码、命令或真实样本</a:t>
-            </a:r>
+            <a:endParaRPr lang="zh-CN" sz="1800" b="0">
+              <a:solidFill>
+                <a:srgbClr val="39545B"/>
+              </a:solidFill>
+              <a:latin typeface="微软雅黑" panose="020B0503020204020204" charset="-122"/>
+              <a:ea typeface="微软雅黑" panose="020B0503020204020204" charset="-122"/>
+            </a:endParaRPr>
           </a:p>
         </p:txBody>
       </p:sp>
     </p:spTree>
   </p:cSld>
+  <p:clrMapOvr>
+    <a:masterClrMapping/>
+  </p:clrMapOvr>
 </p:sld>
 </file>
 
 <file path=ppt/slides/slide6.xml><?xml version="1.0" encoding="utf-8"?>
-<p:sld xmlns:p="http://schemas.openxmlformats.org/presentationml/2006/main">
+<p:sld xmlns:a="http://schemas.openxmlformats.org/drawingml/2006/main" xmlns:r="http://schemas.openxmlformats.org/officeDocument/2006/relationships" xmlns:p="http://schemas.openxmlformats.org/presentationml/2006/main">
   <p:cSld>
     <p:bg>
       <p:bgPr>
-        <a:solidFill xmlns:a="http://schemas.openxmlformats.org/drawingml/2006/main">
+        <a:solidFill>
           <a:srgbClr val="F7FBFA"/>
         </a:solidFill>
+        <a:effectLst/>
       </p:bgPr>
     </p:bg>
     <p:spTree>
@@ -2343,31 +2674,38 @@
           <p:nvPr/>
         </p:nvSpPr>
         <p:spPr>
-          <a:xfrm xmlns:a="http://schemas.openxmlformats.org/drawingml/2006/main">
+          <a:xfrm>
             <a:off x="540000" y="252000"/>
             <a:ext cx="5400000" cy="288000"/>
           </a:xfrm>
-          <a:prstGeom xmlns:a="http://schemas.openxmlformats.org/drawingml/2006/main" prst="rect">
-            <a:avLst/>
-          </a:prstGeom>
-        </p:spPr>
-        <p:txBody>
-          <a:bodyPr xmlns:a="http://schemas.openxmlformats.org/drawingml/2006/main" lIns="43200" tIns="43200" rIns="43200" bIns="43200" anchor="ctr">
+          <a:prstGeom prst="rect">
+            <a:avLst/>
+          </a:prstGeom>
+        </p:spPr>
+        <p:txBody>
+          <a:bodyPr lIns="43200" tIns="43200" rIns="43200" bIns="43200" anchor="ctr">
             <a:normAutofit/>
           </a:bodyPr>
-          <a:lstStyle xmlns:a="http://schemas.openxmlformats.org/drawingml/2006/main"/>
-          <a:p xmlns:a="http://schemas.openxmlformats.org/drawingml/2006/main">
+          <a:lstStyle/>
+          <a:p>
             <a:pPr algn="l"/>
             <a:r>
               <a:rPr lang="zh-CN" sz="1400" b="1">
                 <a:solidFill>
                   <a:srgbClr val="028090"/>
                 </a:solidFill>
-                <a:latin typeface="Microsoft YaHei"/>
-                <a:ea typeface="Microsoft YaHei"/>
+                <a:latin typeface="微软雅黑" panose="020B0503020204020204" charset="-122"/>
+                <a:ea typeface="微软雅黑" panose="020B0503020204020204" charset="-122"/>
               </a:rPr>
               <a:t>06 · 90 秒</a:t>
             </a:r>
+            <a:endParaRPr lang="zh-CN" sz="1400" b="1">
+              <a:solidFill>
+                <a:srgbClr val="028090"/>
+              </a:solidFill>
+              <a:latin typeface="微软雅黑" panose="020B0503020204020204" charset="-122"/>
+              <a:ea typeface="微软雅黑" panose="020B0503020204020204" charset="-122"/>
+            </a:endParaRPr>
           </a:p>
         </p:txBody>
       </p:sp>
@@ -2378,31 +2716,38 @@
           <p:nvPr/>
         </p:nvSpPr>
         <p:spPr>
-          <a:xfrm xmlns:a="http://schemas.openxmlformats.org/drawingml/2006/main">
+          <a:xfrm>
             <a:off x="540000" y="558000"/>
             <a:ext cx="10980000" cy="756000"/>
           </a:xfrm>
-          <a:prstGeom xmlns:a="http://schemas.openxmlformats.org/drawingml/2006/main" prst="rect">
-            <a:avLst/>
-          </a:prstGeom>
-        </p:spPr>
-        <p:txBody>
-          <a:bodyPr xmlns:a="http://schemas.openxmlformats.org/drawingml/2006/main" lIns="43200" tIns="43200" rIns="43200" bIns="43200" anchor="ctr">
+          <a:prstGeom prst="rect">
+            <a:avLst/>
+          </a:prstGeom>
+        </p:spPr>
+        <p:txBody>
+          <a:bodyPr lIns="43200" tIns="43200" rIns="43200" bIns="43200" anchor="ctr">
             <a:normAutofit/>
           </a:bodyPr>
-          <a:lstStyle xmlns:a="http://schemas.openxmlformats.org/drawingml/2006/main"/>
-          <a:p xmlns:a="http://schemas.openxmlformats.org/drawingml/2006/main">
+          <a:lstStyle/>
+          <a:p>
             <a:pPr algn="l"/>
             <a:r>
               <a:rPr lang="zh-CN" sz="3800" b="1">
                 <a:solidFill>
                   <a:srgbClr val="183B45"/>
                 </a:solidFill>
-                <a:latin typeface="Microsoft YaHei"/>
-                <a:ea typeface="Microsoft YaHei"/>
+                <a:latin typeface="微软雅黑" panose="020B0503020204020204" charset="-122"/>
+                <a:ea typeface="微软雅黑" panose="020B0503020204020204" charset="-122"/>
               </a:rPr>
               <a:t>一个真实失败案例</a:t>
             </a:r>
+            <a:endParaRPr lang="zh-CN" sz="3800" b="1">
+              <a:solidFill>
+                <a:srgbClr val="183B45"/>
+              </a:solidFill>
+              <a:latin typeface="微软雅黑" panose="020B0503020204020204" charset="-122"/>
+              <a:ea typeface="微软雅黑" panose="020B0503020204020204" charset="-122"/>
+            </a:endParaRPr>
           </a:p>
         </p:txBody>
       </p:sp>
@@ -2413,24 +2758,24 @@
           <p:nvPr/>
         </p:nvSpPr>
         <p:spPr>
-          <a:xfrm xmlns:a="http://schemas.openxmlformats.org/drawingml/2006/main">
+          <a:xfrm>
             <a:off x="11232000" y="252000"/>
             <a:ext cx="396000" cy="396000"/>
           </a:xfrm>
-          <a:prstGeom xmlns:a="http://schemas.openxmlformats.org/drawingml/2006/main" prst="ellipse">
-            <a:avLst/>
-          </a:prstGeom>
-          <a:solidFill xmlns:a="http://schemas.openxmlformats.org/drawingml/2006/main">
+          <a:prstGeom prst="ellipse">
+            <a:avLst/>
+          </a:prstGeom>
+          <a:solidFill>
             <a:srgbClr val="02C39A"/>
           </a:solidFill>
-          <a:ln xmlns:a="http://schemas.openxmlformats.org/drawingml/2006/main">
+          <a:ln>
             <a:noFill/>
           </a:ln>
         </p:spPr>
         <p:txBody>
-          <a:bodyPr xmlns:a="http://schemas.openxmlformats.org/drawingml/2006/main"/>
-          <a:lstStyle xmlns:a="http://schemas.openxmlformats.org/drawingml/2006/main"/>
-          <a:p xmlns:a="http://schemas.openxmlformats.org/drawingml/2006/main"/>
+          <a:bodyPr/>
+          <a:lstStyle/>
+          <a:p/>
         </p:txBody>
       </p:sp>
       <p:sp>
@@ -2440,37 +2785,114 @@
           <p:nvPr/>
         </p:nvSpPr>
         <p:spPr>
-          <a:xfrm xmlns:a="http://schemas.openxmlformats.org/drawingml/2006/main">
+          <a:xfrm>
             <a:off x="540000" y="2160000"/>
             <a:ext cx="5292000" cy="2340000"/>
           </a:xfrm>
-          <a:prstGeom xmlns:a="http://schemas.openxmlformats.org/drawingml/2006/main" prst="roundRect">
-            <a:avLst/>
-          </a:prstGeom>
-          <a:solidFill xmlns:a="http://schemas.openxmlformats.org/drawingml/2006/main">
+          <a:prstGeom prst="roundRect">
+            <a:avLst/>
+          </a:prstGeom>
+          <a:solidFill>
             <a:srgbClr val="183B45"/>
           </a:solidFill>
-          <a:ln xmlns:a="http://schemas.openxmlformats.org/drawingml/2006/main">
+          <a:ln>
             <a:noFill/>
           </a:ln>
         </p:spPr>
         <p:txBody>
-          <a:bodyPr xmlns:a="http://schemas.openxmlformats.org/drawingml/2006/main" lIns="90000" tIns="90000" rIns="90000" bIns="90000" anchor="ctr">
+          <a:bodyPr lIns="90000" tIns="90000" rIns="90000" bIns="90000" anchor="ctr">
             <a:normAutofit/>
           </a:bodyPr>
-          <a:lstStyle xmlns:a="http://schemas.openxmlformats.org/drawingml/2006/main"/>
-          <a:p xmlns:a="http://schemas.openxmlformats.org/drawingml/2006/main">
+          <a:lstStyle/>
+          <a:p>
             <a:pPr algn="ctr"/>
             <a:r>
-              <a:rPr lang="zh-CN" sz="2300" b="1">
+              <a:rPr lang="zh-CN" altLang="en-US" sz="2300" b="1">
                 <a:solidFill>
                   <a:srgbClr val="FFFFFF"/>
                 </a:solidFill>
-                <a:latin typeface="Microsoft YaHei"/>
-                <a:ea typeface="Microsoft YaHei"/>
-              </a:rPr>
-              <a:t>真实输入与系统输出</a:t>
-            </a:r>
+                <a:latin typeface="微软雅黑" panose="020B0503020204020204" charset="-122"/>
+                <a:ea typeface="微软雅黑" panose="020B0503020204020204" charset="-122"/>
+              </a:rPr>
+              <a:t>真实失败（最终模型 </a:t>
+            </a:r>
+            <a:r>
+              <a:rPr lang="en-US" altLang="zh-CN" sz="2300" b="1">
+                <a:solidFill>
+                  <a:srgbClr val="FFFFFF"/>
+                </a:solidFill>
+                <a:latin typeface="微软雅黑" panose="020B0503020204020204" charset="-122"/>
+                <a:ea typeface="微软雅黑" panose="020B0503020204020204" charset="-122"/>
+              </a:rPr>
+              <a:t>v2）：</a:t>
+            </a:r>
+            <a:r>
+              <a:rPr lang="zh-CN" altLang="en-US" sz="2300" b="1">
+                <a:solidFill>
+                  <a:srgbClr val="FFFFFF"/>
+                </a:solidFill>
+                <a:latin typeface="微软雅黑" panose="020B0503020204020204" charset="-122"/>
+                <a:ea typeface="微软雅黑" panose="020B0503020204020204" charset="-122"/>
+              </a:rPr>
+              <a:t>湿纸巾 </a:t>
+            </a:r>
+            <a:r>
+              <a:rPr lang="en-US" altLang="zh-CN" sz="2300" b="1">
+                <a:solidFill>
+                  <a:srgbClr val="FFFFFF"/>
+                </a:solidFill>
+                <a:latin typeface="微软雅黑" panose="020B0503020204020204" charset="-122"/>
+                <a:ea typeface="微软雅黑" panose="020B0503020204020204" charset="-122"/>
+              </a:rPr>
+              <a:t>img_</a:t>
+            </a:r>
+            <a:r>
+              <a:rPr lang="zh-CN" altLang="en-US" sz="2300" b="1">
+                <a:solidFill>
+                  <a:srgbClr val="FFFFFF"/>
+                </a:solidFill>
+                <a:latin typeface="微软雅黑" panose="020B0503020204020204" charset="-122"/>
+                <a:ea typeface="微软雅黑" panose="020B0503020204020204" charset="-122"/>
+              </a:rPr>
+              <a:t>湿纸巾_72.</a:t>
+            </a:r>
+            <a:r>
+              <a:rPr lang="en-US" altLang="zh-CN" sz="2300" b="1">
+                <a:solidFill>
+                  <a:srgbClr val="FFFFFF"/>
+                </a:solidFill>
+                <a:latin typeface="微软雅黑" panose="020B0503020204020204" charset="-122"/>
+                <a:ea typeface="微软雅黑" panose="020B0503020204020204" charset="-122"/>
+              </a:rPr>
+              <a:t>jpeg，</a:t>
+            </a:r>
+            <a:r>
+              <a:rPr lang="zh-CN" altLang="en-US" sz="2300" b="1">
+                <a:solidFill>
+                  <a:srgbClr val="FFFFFF"/>
+                </a:solidFill>
+                <a:latin typeface="微软雅黑" panose="020B0503020204020204" charset="-122"/>
+                <a:ea typeface="微软雅黑" panose="020B0503020204020204" charset="-122"/>
+              </a:rPr>
+              <a:t>真值=其他垃圾，预测=可回收物——塑料包装看起来像可回收物</a:t>
+            </a:r>
+            <a:r>
+              <a:rPr lang="zh-CN" altLang="en-US" sz="2300" b="1">
+                <a:solidFill>
+                  <a:srgbClr val="FFFFFF"/>
+                </a:solidFill>
+                <a:latin typeface="微软雅黑" panose="020B0503020204020204" charset="-122"/>
+                <a:ea typeface="微软雅黑" panose="020B0503020204020204" charset="-122"/>
+              </a:rPr>
+              <a:t>）</a:t>
+            </a:r>
+            <a:endParaRPr lang="zh-CN" altLang="en-US" sz="2300" b="1">
+              <a:solidFill>
+                <a:srgbClr val="FFFFFF"/>
+              </a:solidFill>
+              <a:latin typeface="微软雅黑" panose="020B0503020204020204" charset="-122"/>
+              <a:ea typeface="微软雅黑" panose="020B0503020204020204" charset="-122"/>
+            </a:endParaRPr>
           </a:p>
         </p:txBody>
       </p:sp>
@@ -2481,37 +2903,84 @@
           <p:nvPr/>
         </p:nvSpPr>
         <p:spPr>
-          <a:xfrm xmlns:a="http://schemas.openxmlformats.org/drawingml/2006/main">
+          <a:xfrm>
             <a:off x="6156000" y="2160000"/>
             <a:ext cx="5436000" cy="2340000"/>
           </a:xfrm>
-          <a:prstGeom xmlns:a="http://schemas.openxmlformats.org/drawingml/2006/main" prst="roundRect">
-            <a:avLst/>
-          </a:prstGeom>
-          <a:solidFill xmlns:a="http://schemas.openxmlformats.org/drawingml/2006/main">
+          <a:prstGeom prst="roundRect">
+            <a:avLst/>
+          </a:prstGeom>
+          <a:solidFill>
             <a:srgbClr val="02C39A"/>
           </a:solidFill>
-          <a:ln xmlns:a="http://schemas.openxmlformats.org/drawingml/2006/main">
+          <a:ln>
             <a:noFill/>
           </a:ln>
         </p:spPr>
         <p:txBody>
-          <a:bodyPr xmlns:a="http://schemas.openxmlformats.org/drawingml/2006/main" lIns="90000" tIns="90000" rIns="90000" bIns="90000" anchor="ctr">
+          <a:bodyPr lIns="90000" tIns="90000" rIns="90000" bIns="90000" anchor="ctr">
             <a:normAutofit/>
           </a:bodyPr>
-          <a:lstStyle xmlns:a="http://schemas.openxmlformats.org/drawingml/2006/main"/>
-          <a:p xmlns:a="http://schemas.openxmlformats.org/drawingml/2006/main">
+          <a:lstStyle/>
+          <a:p>
             <a:pPr algn="ctr"/>
             <a:r>
-              <a:rPr lang="zh-CN" sz="2300" b="1">
+              <a:rPr lang="zh-CN" altLang="en-US" sz="2300" b="1">
                 <a:solidFill>
                   <a:srgbClr val="083B35"/>
                 </a:solidFill>
-                <a:latin typeface="Microsoft YaHei"/>
-                <a:ea typeface="Microsoft YaHei"/>
-              </a:rPr>
-              <a:t>限制 · 不能证明 · 下一检查</a:t>
-            </a:r>
+                <a:latin typeface="微软雅黑" panose="020B0503020204020204" charset="-122"/>
+                <a:ea typeface="微软雅黑" panose="020B0503020204020204" charset="-122"/>
+              </a:rPr>
+              <a:t>失败 276/2417；可回收物仍相对较弱 0.80；不能证明模型无用（准确率 0.8858）；</a:t>
+            </a:r>
+            <a:endParaRPr lang="zh-CN" altLang="en-US" sz="2300" b="1">
+              <a:solidFill>
+                <a:srgbClr val="083B35"/>
+              </a:solidFill>
+              <a:latin typeface="微软雅黑" panose="020B0503020204020204" charset="-122"/>
+              <a:ea typeface="微软雅黑" panose="020B0503020204020204" charset="-122"/>
+            </a:endParaRPr>
+          </a:p>
+          <a:p>
+            <a:pPr algn="ctr"/>
+            <a:r>
+              <a:rPr lang="zh-CN" altLang="en-US" sz="2300" b="1">
+                <a:solidFill>
+                  <a:srgbClr val="083B35"/>
+                </a:solidFill>
+                <a:latin typeface="微软雅黑" panose="020B0503020204020204" charset="-122"/>
+                <a:ea typeface="微软雅黑" panose="020B0503020204020204" charset="-122"/>
+              </a:rPr>
+              <a:t>下一检查：按类统计（候选一可回收物曾 0.39 → </a:t>
+            </a:r>
+            <a:r>
+              <a:rPr lang="en-US" altLang="zh-CN" sz="2300" b="1">
+                <a:solidFill>
+                  <a:srgbClr val="083B35"/>
+                </a:solidFill>
+                <a:latin typeface="微软雅黑" panose="020B0503020204020204" charset="-122"/>
+                <a:ea typeface="微软雅黑" panose="020B0503020204020204" charset="-122"/>
+              </a:rPr>
+              <a:t>v2 </a:t>
+            </a:r>
+            <a:r>
+              <a:rPr lang="zh-CN" altLang="en-US" sz="2300" b="1">
+                <a:solidFill>
+                  <a:srgbClr val="083B35"/>
+                </a:solidFill>
+                <a:latin typeface="微软雅黑" panose="020B0503020204020204" charset="-122"/>
+                <a:ea typeface="微软雅黑" panose="020B0503020204020204" charset="-122"/>
+              </a:rPr>
+              <a:t>提升到 0.80）</a:t>
+            </a:r>
+            <a:endParaRPr lang="zh-CN" altLang="en-US" sz="2300" b="1">
+              <a:solidFill>
+                <a:srgbClr val="083B35"/>
+              </a:solidFill>
+              <a:latin typeface="微软雅黑" panose="020B0503020204020204" charset="-122"/>
+              <a:ea typeface="微软雅黑" panose="020B0503020204020204" charset="-122"/>
+            </a:endParaRPr>
           </a:p>
         </p:txBody>
       </p:sp>
@@ -2522,47 +2991,48 @@
           <p:nvPr/>
         </p:nvSpPr>
         <p:spPr>
-          <a:xfrm xmlns:a="http://schemas.openxmlformats.org/drawingml/2006/main">
+          <a:xfrm>
             <a:off x="720000" y="5184000"/>
             <a:ext cx="10764000" cy="432000"/>
           </a:xfrm>
-          <a:prstGeom xmlns:a="http://schemas.openxmlformats.org/drawingml/2006/main" prst="rect">
-            <a:avLst/>
-          </a:prstGeom>
-        </p:spPr>
-        <p:txBody>
-          <a:bodyPr xmlns:a="http://schemas.openxmlformats.org/drawingml/2006/main" lIns="43200" tIns="43200" rIns="43200" bIns="43200" anchor="ctr">
+          <a:prstGeom prst="rect">
+            <a:avLst/>
+          </a:prstGeom>
+        </p:spPr>
+        <p:txBody>
+          <a:bodyPr lIns="43200" tIns="43200" rIns="43200" bIns="43200" anchor="ctr">
             <a:normAutofit/>
           </a:bodyPr>
-          <a:lstStyle xmlns:a="http://schemas.openxmlformats.org/drawingml/2006/main"/>
-          <a:p xmlns:a="http://schemas.openxmlformats.org/drawingml/2006/main">
+          <a:lstStyle/>
+          <a:p>
             <a:pPr algn="ctr"/>
-            <a:r>
-              <a:rPr lang="zh-CN" sz="1800" b="0">
-                <a:solidFill>
-                  <a:srgbClr val="39545B"/>
-                </a:solidFill>
-                <a:latin typeface="Microsoft YaHei"/>
-                <a:ea typeface="Microsoft YaHei"/>
-              </a:rPr>
-              <a:t>总时长 10 分钟 · 每个数字都要能回到代码、命令或真实样本</a:t>
-            </a:r>
+            <a:endParaRPr lang="zh-CN" sz="1800" b="0">
+              <a:solidFill>
+                <a:srgbClr val="39545B"/>
+              </a:solidFill>
+              <a:latin typeface="微软雅黑" panose="020B0503020204020204" charset="-122"/>
+              <a:ea typeface="微软雅黑" panose="020B0503020204020204" charset="-122"/>
+            </a:endParaRPr>
           </a:p>
         </p:txBody>
       </p:sp>
     </p:spTree>
   </p:cSld>
+  <p:clrMapOvr>
+    <a:masterClrMapping/>
+  </p:clrMapOvr>
 </p:sld>
 </file>
 
 <file path=ppt/slides/slide7.xml><?xml version="1.0" encoding="utf-8"?>
-<p:sld xmlns:p="http://schemas.openxmlformats.org/presentationml/2006/main">
+<p:sld xmlns:a="http://schemas.openxmlformats.org/drawingml/2006/main" xmlns:r="http://schemas.openxmlformats.org/officeDocument/2006/relationships" xmlns:p="http://schemas.openxmlformats.org/presentationml/2006/main">
   <p:cSld>
     <p:bg>
       <p:bgPr>
-        <a:solidFill xmlns:a="http://schemas.openxmlformats.org/drawingml/2006/main">
+        <a:solidFill>
           <a:srgbClr val="F7FBFA"/>
         </a:solidFill>
+        <a:effectLst/>
       </p:bgPr>
     </p:bg>
     <p:spTree>
@@ -2579,31 +3049,38 @@
           <p:nvPr/>
         </p:nvSpPr>
         <p:spPr>
-          <a:xfrm xmlns:a="http://schemas.openxmlformats.org/drawingml/2006/main">
+          <a:xfrm>
             <a:off x="540000" y="252000"/>
             <a:ext cx="5400000" cy="288000"/>
           </a:xfrm>
-          <a:prstGeom xmlns:a="http://schemas.openxmlformats.org/drawingml/2006/main" prst="rect">
-            <a:avLst/>
-          </a:prstGeom>
-        </p:spPr>
-        <p:txBody>
-          <a:bodyPr xmlns:a="http://schemas.openxmlformats.org/drawingml/2006/main" lIns="43200" tIns="43200" rIns="43200" bIns="43200" anchor="ctr">
+          <a:prstGeom prst="rect">
+            <a:avLst/>
+          </a:prstGeom>
+        </p:spPr>
+        <p:txBody>
+          <a:bodyPr lIns="43200" tIns="43200" rIns="43200" bIns="43200" anchor="ctr">
             <a:normAutofit/>
           </a:bodyPr>
-          <a:lstStyle xmlns:a="http://schemas.openxmlformats.org/drawingml/2006/main"/>
-          <a:p xmlns:a="http://schemas.openxmlformats.org/drawingml/2006/main">
+          <a:lstStyle/>
+          <a:p>
             <a:pPr algn="l"/>
             <a:r>
               <a:rPr lang="zh-CN" sz="1400" b="1">
                 <a:solidFill>
                   <a:srgbClr val="028090"/>
                 </a:solidFill>
-                <a:latin typeface="Microsoft YaHei"/>
-                <a:ea typeface="Microsoft YaHei"/>
+                <a:latin typeface="微软雅黑" panose="020B0503020204020204" charset="-122"/>
+                <a:ea typeface="微软雅黑" panose="020B0503020204020204" charset="-122"/>
               </a:rPr>
               <a:t>07 · 90 秒</a:t>
             </a:r>
+            <a:endParaRPr lang="zh-CN" sz="1400" b="1">
+              <a:solidFill>
+                <a:srgbClr val="028090"/>
+              </a:solidFill>
+              <a:latin typeface="微软雅黑" panose="020B0503020204020204" charset="-122"/>
+              <a:ea typeface="微软雅黑" panose="020B0503020204020204" charset="-122"/>
+            </a:endParaRPr>
           </a:p>
         </p:txBody>
       </p:sp>
@@ -2614,31 +3091,38 @@
           <p:nvPr/>
         </p:nvSpPr>
         <p:spPr>
-          <a:xfrm xmlns:a="http://schemas.openxmlformats.org/drawingml/2006/main">
+          <a:xfrm>
             <a:off x="540000" y="558000"/>
             <a:ext cx="10980000" cy="756000"/>
           </a:xfrm>
-          <a:prstGeom xmlns:a="http://schemas.openxmlformats.org/drawingml/2006/main" prst="rect">
-            <a:avLst/>
-          </a:prstGeom>
-        </p:spPr>
-        <p:txBody>
-          <a:bodyPr xmlns:a="http://schemas.openxmlformats.org/drawingml/2006/main" lIns="43200" tIns="43200" rIns="43200" bIns="43200" anchor="ctr">
+          <a:prstGeom prst="rect">
+            <a:avLst/>
+          </a:prstGeom>
+        </p:spPr>
+        <p:txBody>
+          <a:bodyPr lIns="43200" tIns="43200" rIns="43200" bIns="43200" anchor="ctr">
             <a:normAutofit/>
           </a:bodyPr>
-          <a:lstStyle xmlns:a="http://schemas.openxmlformats.org/drawingml/2006/main"/>
-          <a:p xmlns:a="http://schemas.openxmlformats.org/drawingml/2006/main">
+          <a:lstStyle/>
+          <a:p>
             <a:pPr algn="l"/>
             <a:r>
               <a:rPr lang="zh-CN" sz="3800" b="1">
                 <a:solidFill>
                   <a:srgbClr val="183B45"/>
                 </a:solidFill>
-                <a:latin typeface="Microsoft YaHei"/>
-                <a:ea typeface="Microsoft YaHei"/>
+                <a:latin typeface="微软雅黑" panose="020B0503020204020204" charset="-122"/>
+                <a:ea typeface="微软雅黑" panose="020B0503020204020204" charset="-122"/>
               </a:rPr>
               <a:t>运行演示与可复现证据</a:t>
             </a:r>
+            <a:endParaRPr lang="zh-CN" sz="3800" b="1">
+              <a:solidFill>
+                <a:srgbClr val="183B45"/>
+              </a:solidFill>
+              <a:latin typeface="微软雅黑" panose="020B0503020204020204" charset="-122"/>
+              <a:ea typeface="微软雅黑" panose="020B0503020204020204" charset="-122"/>
+            </a:endParaRPr>
           </a:p>
         </p:txBody>
       </p:sp>
@@ -2649,24 +3133,24 @@
           <p:nvPr/>
         </p:nvSpPr>
         <p:spPr>
-          <a:xfrm xmlns:a="http://schemas.openxmlformats.org/drawingml/2006/main">
+          <a:xfrm>
             <a:off x="11232000" y="252000"/>
             <a:ext cx="396000" cy="396000"/>
           </a:xfrm>
-          <a:prstGeom xmlns:a="http://schemas.openxmlformats.org/drawingml/2006/main" prst="ellipse">
-            <a:avLst/>
-          </a:prstGeom>
-          <a:solidFill xmlns:a="http://schemas.openxmlformats.org/drawingml/2006/main">
+          <a:prstGeom prst="ellipse">
+            <a:avLst/>
+          </a:prstGeom>
+          <a:solidFill>
             <a:srgbClr val="02C39A"/>
           </a:solidFill>
-          <a:ln xmlns:a="http://schemas.openxmlformats.org/drawingml/2006/main">
+          <a:ln>
             <a:noFill/>
           </a:ln>
         </p:spPr>
         <p:txBody>
-          <a:bodyPr xmlns:a="http://schemas.openxmlformats.org/drawingml/2006/main"/>
-          <a:lstStyle xmlns:a="http://schemas.openxmlformats.org/drawingml/2006/main"/>
-          <a:p xmlns:a="http://schemas.openxmlformats.org/drawingml/2006/main"/>
+          <a:bodyPr/>
+          <a:lstStyle/>
+          <a:p/>
         </p:txBody>
       </p:sp>
       <p:sp>
@@ -2676,37 +3160,44 @@
           <p:nvPr/>
         </p:nvSpPr>
         <p:spPr>
-          <a:xfrm xmlns:a="http://schemas.openxmlformats.org/drawingml/2006/main">
+          <a:xfrm>
             <a:off x="540000" y="2160000"/>
             <a:ext cx="5292000" cy="2340000"/>
           </a:xfrm>
-          <a:prstGeom xmlns:a="http://schemas.openxmlformats.org/drawingml/2006/main" prst="roundRect">
-            <a:avLst/>
-          </a:prstGeom>
-          <a:solidFill xmlns:a="http://schemas.openxmlformats.org/drawingml/2006/main">
+          <a:prstGeom prst="roundRect">
+            <a:avLst/>
+          </a:prstGeom>
+          <a:solidFill>
             <a:srgbClr val="183B45"/>
           </a:solidFill>
-          <a:ln xmlns:a="http://schemas.openxmlformats.org/drawingml/2006/main">
+          <a:ln>
             <a:noFill/>
           </a:ln>
         </p:spPr>
         <p:txBody>
-          <a:bodyPr xmlns:a="http://schemas.openxmlformats.org/drawingml/2006/main" lIns="90000" tIns="90000" rIns="90000" bIns="90000" anchor="ctr">
+          <a:bodyPr lIns="90000" tIns="90000" rIns="90000" bIns="90000" anchor="ctr">
             <a:normAutofit/>
           </a:bodyPr>
-          <a:lstStyle xmlns:a="http://schemas.openxmlformats.org/drawingml/2006/main"/>
-          <a:p xmlns:a="http://schemas.openxmlformats.org/drawingml/2006/main">
+          <a:lstStyle/>
+          <a:p>
             <a:pPr algn="ctr"/>
             <a:r>
-              <a:rPr lang="zh-CN" sz="2300" b="1">
+              <a:rPr lang="en-US" altLang="zh-CN" sz="2300" b="1">
                 <a:solidFill>
                   <a:srgbClr val="FFFFFF"/>
                 </a:solidFill>
-                <a:latin typeface="Microsoft YaHei"/>
-                <a:ea typeface="Microsoft YaHei"/>
-              </a:rPr>
-              <a:t>README 精确命令</a:t>
-            </a:r>
+                <a:latin typeface="微软雅黑" panose="020B0503020204020204" charset="-122"/>
+                <a:ea typeface="微软雅黑" panose="020B0503020204020204" charset="-122"/>
+              </a:rPr>
+              <a:t>python candidate_v2.py（0.8858）</a:t>
+            </a:r>
+            <a:endParaRPr lang="en-US" altLang="zh-CN" sz="2300" b="1">
+              <a:solidFill>
+                <a:srgbClr val="FFFFFF"/>
+              </a:solidFill>
+              <a:latin typeface="微软雅黑" panose="020B0503020204020204" charset="-122"/>
+              <a:ea typeface="微软雅黑" panose="020B0503020204020204" charset="-122"/>
+            </a:endParaRPr>
           </a:p>
         </p:txBody>
       </p:sp>
@@ -2717,37 +3208,124 @@
           <p:nvPr/>
         </p:nvSpPr>
         <p:spPr>
-          <a:xfrm xmlns:a="http://schemas.openxmlformats.org/drawingml/2006/main">
+          <a:xfrm>
             <a:off x="6156000" y="2160000"/>
             <a:ext cx="5436000" cy="2340000"/>
           </a:xfrm>
-          <a:prstGeom xmlns:a="http://schemas.openxmlformats.org/drawingml/2006/main" prst="roundRect">
-            <a:avLst/>
-          </a:prstGeom>
-          <a:solidFill xmlns:a="http://schemas.openxmlformats.org/drawingml/2006/main">
+          <a:prstGeom prst="roundRect">
+            <a:avLst/>
+          </a:prstGeom>
+          <a:solidFill>
             <a:srgbClr val="02C39A"/>
           </a:solidFill>
-          <a:ln xmlns:a="http://schemas.openxmlformats.org/drawingml/2006/main">
+          <a:ln>
             <a:noFill/>
           </a:ln>
         </p:spPr>
         <p:txBody>
-          <a:bodyPr xmlns:a="http://schemas.openxmlformats.org/drawingml/2006/main" lIns="90000" tIns="90000" rIns="90000" bIns="90000" anchor="ctr">
-            <a:normAutofit/>
-          </a:bodyPr>
-          <a:lstStyle xmlns:a="http://schemas.openxmlformats.org/drawingml/2006/main"/>
-          <a:p xmlns:a="http://schemas.openxmlformats.org/drawingml/2006/main">
+          <a:bodyPr lIns="90000" tIns="90000" rIns="90000" bIns="90000" anchor="ctr">
+            <a:normAutofit lnSpcReduction="20000"/>
+          </a:bodyPr>
+          <a:lstStyle/>
+          <a:p>
             <a:pPr algn="ctr"/>
             <a:r>
-              <a:rPr lang="zh-CN" sz="2300" b="1">
+              <a:rPr lang="zh-CN" altLang="en-US" sz="2300" b="1">
                 <a:solidFill>
                   <a:srgbClr val="083B35"/>
                 </a:solidFill>
-                <a:latin typeface="Microsoft YaHei"/>
-                <a:ea typeface="Microsoft YaHei"/>
-              </a:rPr>
-              <a:t>测试 · 输出 · 失败备用</a:t>
-            </a:r>
+                <a:latin typeface="微软雅黑" panose="020B0503020204020204" charset="-122"/>
+                <a:ea typeface="微软雅黑" panose="020B0503020204020204" charset="-122"/>
+              </a:rPr>
+              <a:t>测试 </a:t>
+            </a:r>
+            <a:r>
+              <a:rPr lang="en-US" altLang="zh-CN" sz="2300" b="1">
+                <a:solidFill>
+                  <a:srgbClr val="083B35"/>
+                </a:solidFill>
+                <a:latin typeface="微软雅黑" panose="020B0503020204020204" charset="-122"/>
+                <a:ea typeface="微软雅黑" panose="020B0503020204020204" charset="-122"/>
+              </a:rPr>
+              <a:t>python -m pytest tests/（2 passed）；</a:t>
+            </a:r>
+            <a:endParaRPr lang="en-US" altLang="zh-CN" sz="2300" b="1">
+              <a:solidFill>
+                <a:srgbClr val="083B35"/>
+              </a:solidFill>
+              <a:latin typeface="微软雅黑" panose="020B0503020204020204" charset="-122"/>
+              <a:ea typeface="微软雅黑" panose="020B0503020204020204" charset="-122"/>
+            </a:endParaRPr>
+          </a:p>
+          <a:p>
+            <a:pPr algn="ctr"/>
+            <a:r>
+              <a:rPr lang="zh-CN" altLang="en-US" sz="2300" b="1">
+                <a:solidFill>
+                  <a:srgbClr val="083B35"/>
+                </a:solidFill>
+                <a:latin typeface="微软雅黑" panose="020B0503020204020204" charset="-122"/>
+                <a:ea typeface="微软雅黑" panose="020B0503020204020204" charset="-122"/>
+              </a:rPr>
+              <a:t>输出文件：</a:t>
+            </a:r>
+            <a:r>
+              <a:rPr lang="en-US" altLang="zh-CN" sz="2300" b="1">
+                <a:solidFill>
+                  <a:srgbClr val="083B35"/>
+                </a:solidFill>
+                <a:latin typeface="微软雅黑" panose="020B0503020204020204" charset="-122"/>
+                <a:ea typeface="微软雅黑" panose="020B0503020204020204" charset="-122"/>
+              </a:rPr>
+              <a:t>candidate_result.txt / failure_examples.txt；</a:t>
+            </a:r>
+            <a:endParaRPr lang="en-US" altLang="zh-CN" sz="2300" b="1">
+              <a:solidFill>
+                <a:srgbClr val="083B35"/>
+              </a:solidFill>
+              <a:latin typeface="微软雅黑" panose="020B0503020204020204" charset="-122"/>
+              <a:ea typeface="微软雅黑" panose="020B0503020204020204" charset="-122"/>
+            </a:endParaRPr>
+          </a:p>
+          <a:p>
+            <a:pPr algn="ctr"/>
+            <a:r>
+              <a:rPr lang="zh-CN" altLang="en-US" sz="2300" b="1">
+                <a:solidFill>
+                  <a:srgbClr val="083B35"/>
+                </a:solidFill>
+                <a:latin typeface="微软雅黑" panose="020B0503020204020204" charset="-122"/>
+                <a:ea typeface="微软雅黑" panose="020B0503020204020204" charset="-122"/>
+              </a:rPr>
+              <a:t>演示失败时用 </a:t>
+            </a:r>
+            <a:r>
+              <a:rPr lang="en-US" altLang="zh-CN" sz="2300" b="1">
+                <a:solidFill>
+                  <a:srgbClr val="083B35"/>
+                </a:solidFill>
+                <a:latin typeface="微软雅黑" panose="020B0503020204020204" charset="-122"/>
+                <a:ea typeface="微软雅黑" panose="020B0503020204020204" charset="-122"/>
+              </a:rPr>
+              <a:t>README </a:t>
+            </a:r>
+            <a:r>
+              <a:rPr lang="zh-CN" altLang="en-US" sz="2300" b="1">
+                <a:solidFill>
+                  <a:srgbClr val="083B35"/>
+                </a:solidFill>
+                <a:latin typeface="微软雅黑" panose="020B0503020204020204" charset="-122"/>
+                <a:ea typeface="微软雅黑" panose="020B0503020204020204" charset="-122"/>
+              </a:rPr>
+              <a:t>命令 + 保存的输出继续</a:t>
+            </a:r>
+            <a:endParaRPr lang="zh-CN" altLang="en-US" sz="2300" b="1">
+              <a:solidFill>
+                <a:srgbClr val="083B35"/>
+              </a:solidFill>
+              <a:latin typeface="微软雅黑" panose="020B0503020204020204" charset="-122"/>
+              <a:ea typeface="微软雅黑" panose="020B0503020204020204" charset="-122"/>
+            </a:endParaRPr>
           </a:p>
         </p:txBody>
       </p:sp>
@@ -2758,47 +3336,48 @@
           <p:nvPr/>
         </p:nvSpPr>
         <p:spPr>
-          <a:xfrm xmlns:a="http://schemas.openxmlformats.org/drawingml/2006/main">
+          <a:xfrm>
             <a:off x="720000" y="5184000"/>
             <a:ext cx="10764000" cy="432000"/>
           </a:xfrm>
-          <a:prstGeom xmlns:a="http://schemas.openxmlformats.org/drawingml/2006/main" prst="rect">
-            <a:avLst/>
-          </a:prstGeom>
-        </p:spPr>
-        <p:txBody>
-          <a:bodyPr xmlns:a="http://schemas.openxmlformats.org/drawingml/2006/main" lIns="43200" tIns="43200" rIns="43200" bIns="43200" anchor="ctr">
+          <a:prstGeom prst="rect">
+            <a:avLst/>
+          </a:prstGeom>
+        </p:spPr>
+        <p:txBody>
+          <a:bodyPr lIns="43200" tIns="43200" rIns="43200" bIns="43200" anchor="ctr">
             <a:normAutofit/>
           </a:bodyPr>
-          <a:lstStyle xmlns:a="http://schemas.openxmlformats.org/drawingml/2006/main"/>
-          <a:p xmlns:a="http://schemas.openxmlformats.org/drawingml/2006/main">
+          <a:lstStyle/>
+          <a:p>
             <a:pPr algn="ctr"/>
-            <a:r>
-              <a:rPr lang="zh-CN" sz="1800" b="0">
-                <a:solidFill>
-                  <a:srgbClr val="39545B"/>
-                </a:solidFill>
-                <a:latin typeface="Microsoft YaHei"/>
-                <a:ea typeface="Microsoft YaHei"/>
-              </a:rPr>
-              <a:t>总时长 10 分钟 · 每个数字都要能回到代码、命令或真实样本</a:t>
-            </a:r>
+            <a:endParaRPr lang="zh-CN" sz="1800" b="0">
+              <a:solidFill>
+                <a:srgbClr val="39545B"/>
+              </a:solidFill>
+              <a:latin typeface="微软雅黑" panose="020B0503020204020204" charset="-122"/>
+              <a:ea typeface="微软雅黑" panose="020B0503020204020204" charset="-122"/>
+            </a:endParaRPr>
           </a:p>
         </p:txBody>
       </p:sp>
     </p:spTree>
   </p:cSld>
+  <p:clrMapOvr>
+    <a:masterClrMapping/>
+  </p:clrMapOvr>
 </p:sld>
 </file>
 
 <file path=ppt/slides/slide8.xml><?xml version="1.0" encoding="utf-8"?>
-<p:sld xmlns:p="http://schemas.openxmlformats.org/presentationml/2006/main">
+<p:sld xmlns:a="http://schemas.openxmlformats.org/drawingml/2006/main" xmlns:r="http://schemas.openxmlformats.org/officeDocument/2006/relationships" xmlns:p="http://schemas.openxmlformats.org/presentationml/2006/main">
   <p:cSld>
     <p:bg>
       <p:bgPr>
-        <a:solidFill xmlns:a="http://schemas.openxmlformats.org/drawingml/2006/main">
+        <a:solidFill>
           <a:srgbClr val="183B45"/>
         </a:solidFill>
+        <a:effectLst/>
       </p:bgPr>
     </p:bg>
     <p:spTree>
@@ -2815,31 +3394,38 @@
           <p:nvPr/>
         </p:nvSpPr>
         <p:spPr>
-          <a:xfrm xmlns:a="http://schemas.openxmlformats.org/drawingml/2006/main">
+          <a:xfrm>
             <a:off x="540000" y="360000"/>
             <a:ext cx="4320000" cy="360000"/>
           </a:xfrm>
-          <a:prstGeom xmlns:a="http://schemas.openxmlformats.org/drawingml/2006/main" prst="rect">
-            <a:avLst/>
-          </a:prstGeom>
-        </p:spPr>
-        <p:txBody>
-          <a:bodyPr xmlns:a="http://schemas.openxmlformats.org/drawingml/2006/main" lIns="43200" tIns="43200" rIns="43200" bIns="43200" anchor="ctr">
+          <a:prstGeom prst="rect">
+            <a:avLst/>
+          </a:prstGeom>
+        </p:spPr>
+        <p:txBody>
+          <a:bodyPr lIns="43200" tIns="43200" rIns="43200" bIns="43200" anchor="ctr">
             <a:normAutofit/>
           </a:bodyPr>
-          <a:lstStyle xmlns:a="http://schemas.openxmlformats.org/drawingml/2006/main"/>
-          <a:p xmlns:a="http://schemas.openxmlformats.org/drawingml/2006/main">
+          <a:lstStyle/>
+          <a:p>
             <a:pPr algn="l"/>
             <a:r>
               <a:rPr lang="zh-CN" sz="1600" b="1">
                 <a:solidFill>
                   <a:srgbClr val="8DDDD0"/>
                 </a:solidFill>
-                <a:latin typeface="Microsoft YaHei"/>
-                <a:ea typeface="Microsoft YaHei"/>
+                <a:latin typeface="微软雅黑" panose="020B0503020204020204" charset="-122"/>
+                <a:ea typeface="微软雅黑" panose="020B0503020204020204" charset="-122"/>
               </a:rPr>
               <a:t>08 · 60 秒</a:t>
             </a:r>
+            <a:endParaRPr lang="zh-CN" sz="1600" b="1">
+              <a:solidFill>
+                <a:srgbClr val="8DDDD0"/>
+              </a:solidFill>
+              <a:latin typeface="微软雅黑" panose="020B0503020204020204" charset="-122"/>
+              <a:ea typeface="微软雅黑" panose="020B0503020204020204" charset="-122"/>
+            </a:endParaRPr>
           </a:p>
         </p:txBody>
       </p:sp>
@@ -2850,31 +3436,38 @@
           <p:nvPr/>
         </p:nvSpPr>
         <p:spPr>
-          <a:xfrm xmlns:a="http://schemas.openxmlformats.org/drawingml/2006/main">
+          <a:xfrm>
             <a:off x="540000" y="756000"/>
             <a:ext cx="10800000" cy="864000"/>
           </a:xfrm>
-          <a:prstGeom xmlns:a="http://schemas.openxmlformats.org/drawingml/2006/main" prst="rect">
-            <a:avLst/>
-          </a:prstGeom>
-        </p:spPr>
-        <p:txBody>
-          <a:bodyPr xmlns:a="http://schemas.openxmlformats.org/drawingml/2006/main" lIns="43200" tIns="43200" rIns="43200" bIns="43200" anchor="ctr">
+          <a:prstGeom prst="rect">
+            <a:avLst/>
+          </a:prstGeom>
+        </p:spPr>
+        <p:txBody>
+          <a:bodyPr lIns="43200" tIns="43200" rIns="43200" bIns="43200" anchor="ctr">
             <a:normAutofit/>
           </a:bodyPr>
-          <a:lstStyle xmlns:a="http://schemas.openxmlformats.org/drawingml/2006/main"/>
-          <a:p xmlns:a="http://schemas.openxmlformats.org/drawingml/2006/main">
+          <a:lstStyle/>
+          <a:p>
             <a:pPr algn="l"/>
             <a:r>
               <a:rPr lang="zh-CN" sz="4000" b="1">
                 <a:solidFill>
                   <a:srgbClr val="FFFFFF"/>
                 </a:solidFill>
-                <a:latin typeface="Microsoft YaHei"/>
-                <a:ea typeface="Microsoft YaHei"/>
+                <a:latin typeface="微软雅黑" panose="020B0503020204020204" charset="-122"/>
+                <a:ea typeface="微软雅黑" panose="020B0503020204020204" charset="-122"/>
               </a:rPr>
               <a:t>边界、智能体贡献与下一步</a:t>
             </a:r>
+            <a:endParaRPr lang="zh-CN" sz="4000" b="1">
+              <a:solidFill>
+                <a:srgbClr val="FFFFFF"/>
+              </a:solidFill>
+              <a:latin typeface="微软雅黑" panose="020B0503020204020204" charset="-122"/>
+              <a:ea typeface="微软雅黑" panose="020B0503020204020204" charset="-122"/>
+            </a:endParaRPr>
           </a:p>
         </p:txBody>
       </p:sp>
@@ -2885,37 +3478,44 @@
           <p:nvPr/>
         </p:nvSpPr>
         <p:spPr>
-          <a:xfrm xmlns:a="http://schemas.openxmlformats.org/drawingml/2006/main">
+          <a:xfrm>
             <a:off x="540000" y="2160000"/>
             <a:ext cx="5292000" cy="2340000"/>
           </a:xfrm>
-          <a:prstGeom xmlns:a="http://schemas.openxmlformats.org/drawingml/2006/main" prst="roundRect">
-            <a:avLst/>
-          </a:prstGeom>
-          <a:solidFill xmlns:a="http://schemas.openxmlformats.org/drawingml/2006/main">
+          <a:prstGeom prst="roundRect">
+            <a:avLst/>
+          </a:prstGeom>
+          <a:solidFill>
             <a:srgbClr val="D7F4EE"/>
           </a:solidFill>
-          <a:ln xmlns:a="http://schemas.openxmlformats.org/drawingml/2006/main">
+          <a:ln>
             <a:noFill/>
           </a:ln>
         </p:spPr>
         <p:txBody>
-          <a:bodyPr xmlns:a="http://schemas.openxmlformats.org/drawingml/2006/main" lIns="90000" tIns="90000" rIns="90000" bIns="90000" anchor="ctr">
+          <a:bodyPr lIns="90000" tIns="90000" rIns="90000" bIns="90000" anchor="ctr">
             <a:normAutofit/>
           </a:bodyPr>
-          <a:lstStyle xmlns:a="http://schemas.openxmlformats.org/drawingml/2006/main"/>
-          <a:p xmlns:a="http://schemas.openxmlformats.org/drawingml/2006/main">
+          <a:lstStyle/>
+          <a:p>
             <a:pPr algn="ctr"/>
             <a:r>
-              <a:rPr lang="zh-CN" sz="2300" b="1">
+              <a:rPr lang="zh-CN" altLang="en-US" sz="2300" b="1">
                 <a:solidFill>
                   <a:srgbClr val="123A3A"/>
                 </a:solidFill>
-                <a:latin typeface="Microsoft YaHei"/>
-                <a:ea typeface="Microsoft YaHei"/>
-              </a:rPr>
-              <a:t>安全/人工边界与学生核查</a:t>
-            </a:r>
+                <a:latin typeface="微软雅黑" panose="020B0503020204020204" charset="-122"/>
+                <a:ea typeface="微软雅黑" panose="020B0503020204020204" charset="-122"/>
+              </a:rPr>
+              <a:t>数据白底室内、类别不均衡；不做自动罚款等高风险决策</a:t>
+            </a:r>
+            <a:endParaRPr lang="zh-CN" altLang="en-US" sz="2300" b="1">
+              <a:solidFill>
+                <a:srgbClr val="123A3A"/>
+              </a:solidFill>
+              <a:latin typeface="微软雅黑" panose="020B0503020204020204" charset="-122"/>
+              <a:ea typeface="微软雅黑" panose="020B0503020204020204" charset="-122"/>
+            </a:endParaRPr>
           </a:p>
         </p:txBody>
       </p:sp>
@@ -2926,37 +3526,44 @@
           <p:nvPr/>
         </p:nvSpPr>
         <p:spPr>
-          <a:xfrm xmlns:a="http://schemas.openxmlformats.org/drawingml/2006/main">
+          <a:xfrm>
             <a:off x="6156000" y="2160000"/>
             <a:ext cx="5436000" cy="2340000"/>
           </a:xfrm>
-          <a:prstGeom xmlns:a="http://schemas.openxmlformats.org/drawingml/2006/main" prst="roundRect">
-            <a:avLst/>
-          </a:prstGeom>
-          <a:solidFill xmlns:a="http://schemas.openxmlformats.org/drawingml/2006/main">
+          <a:prstGeom prst="roundRect">
+            <a:avLst/>
+          </a:prstGeom>
+          <a:solidFill>
             <a:srgbClr val="C9E8F2"/>
           </a:solidFill>
-          <a:ln xmlns:a="http://schemas.openxmlformats.org/drawingml/2006/main">
+          <a:ln>
             <a:noFill/>
           </a:ln>
         </p:spPr>
         <p:txBody>
-          <a:bodyPr xmlns:a="http://schemas.openxmlformats.org/drawingml/2006/main" lIns="90000" tIns="90000" rIns="90000" bIns="90000" anchor="ctr">
+          <a:bodyPr lIns="90000" tIns="90000" rIns="90000" bIns="90000" anchor="ctr">
             <a:normAutofit/>
           </a:bodyPr>
-          <a:lstStyle xmlns:a="http://schemas.openxmlformats.org/drawingml/2006/main"/>
-          <a:p xmlns:a="http://schemas.openxmlformats.org/drawingml/2006/main">
+          <a:lstStyle/>
+          <a:p>
             <a:pPr algn="ctr"/>
             <a:r>
-              <a:rPr lang="zh-CN" sz="2300" b="1">
+              <a:rPr lang="zh-CN" altLang="en-US" sz="2300" b="1">
                 <a:solidFill>
                   <a:srgbClr val="173F5F"/>
                 </a:solidFill>
-                <a:latin typeface="Microsoft YaHei"/>
-                <a:ea typeface="Microsoft YaHei"/>
-              </a:rPr>
-              <a:t>下一项最小可验证改进</a:t>
-            </a:r>
+                <a:latin typeface="微软雅黑" panose="020B0503020204020204" charset="-122"/>
+                <a:ea typeface="微软雅黑" panose="020B0503020204020204" charset="-122"/>
+              </a:rPr>
+              <a:t>下一步：给可回收物加数据 / 提高分辨率</a:t>
+            </a:r>
+            <a:endParaRPr lang="zh-CN" altLang="en-US" sz="2300" b="1">
+              <a:solidFill>
+                <a:srgbClr val="173F5F"/>
+              </a:solidFill>
+              <a:latin typeface="微软雅黑" panose="020B0503020204020204" charset="-122"/>
+              <a:ea typeface="微软雅黑" panose="020B0503020204020204" charset="-122"/>
+            </a:endParaRPr>
           </a:p>
         </p:txBody>
       </p:sp>
@@ -2967,36 +3574,36 @@
           <p:nvPr/>
         </p:nvSpPr>
         <p:spPr>
-          <a:xfrm xmlns:a="http://schemas.openxmlformats.org/drawingml/2006/main">
+          <a:xfrm>
             <a:off x="720000" y="5184000"/>
             <a:ext cx="10764000" cy="432000"/>
           </a:xfrm>
-          <a:prstGeom xmlns:a="http://schemas.openxmlformats.org/drawingml/2006/main" prst="rect">
-            <a:avLst/>
-          </a:prstGeom>
-        </p:spPr>
-        <p:txBody>
-          <a:bodyPr xmlns:a="http://schemas.openxmlformats.org/drawingml/2006/main" lIns="43200" tIns="43200" rIns="43200" bIns="43200" anchor="ctr">
+          <a:prstGeom prst="rect">
+            <a:avLst/>
+          </a:prstGeom>
+        </p:spPr>
+        <p:txBody>
+          <a:bodyPr lIns="43200" tIns="43200" rIns="43200" bIns="43200" anchor="ctr">
             <a:normAutofit/>
           </a:bodyPr>
-          <a:lstStyle xmlns:a="http://schemas.openxmlformats.org/drawingml/2006/main"/>
-          <a:p xmlns:a="http://schemas.openxmlformats.org/drawingml/2006/main">
+          <a:lstStyle/>
+          <a:p>
             <a:pPr algn="ctr"/>
-            <a:r>
-              <a:rPr lang="zh-CN" sz="1800" b="0">
-                <a:solidFill>
-                  <a:srgbClr val="D6F5EE"/>
-                </a:solidFill>
-                <a:latin typeface="Microsoft YaHei"/>
-                <a:ea typeface="Microsoft YaHei"/>
-              </a:rPr>
-              <a:t>总时长 10 分钟 · 每个数字都要能回到代码、命令或真实样本</a:t>
-            </a:r>
+            <a:endParaRPr lang="zh-CN" sz="1800" b="0">
+              <a:solidFill>
+                <a:srgbClr val="D6F5EE"/>
+              </a:solidFill>
+              <a:latin typeface="微软雅黑" panose="020B0503020204020204" charset="-122"/>
+              <a:ea typeface="微软雅黑" panose="020B0503020204020204" charset="-122"/>
+            </a:endParaRPr>
           </a:p>
         </p:txBody>
       </p:sp>
     </p:spTree>
   </p:cSld>
+  <p:clrMapOvr>
+    <a:masterClrMapping/>
+  </p:clrMapOvr>
 </p:sld>
 </file>
 
@@ -3106,5 +3713,124 @@
       </a:bgFillStyleLst>
     </a:fmtScheme>
   </a:themeElements>
+  <a:extLst>
+    <a:ext uri="{05A4C25C-085E-4340-85A3-A5531E510DB2}">
+      <thm15:themeFamily xmlns:thm15="http://schemas.microsoft.com/office/thememl/2012/main" name="Office Theme" id="{62F939B6-93AF-4DB8-9C6B-D6C7DFDC589F}" vid="{4A3C46E8-61CC-4603-A589-7422A47A8E4A}"/>
+    </a:ext>
+  </a:extLst>
+</a:theme>
+</file>
+
+<file path=ppt/theme/theme2.xml><?xml version="1.0" encoding="utf-8"?>
+<a:theme xmlns:a="http://schemas.openxmlformats.org/drawingml/2006/main" name="Office Theme">
+  <a:themeElements>
+    <a:clrScheme name="Office">
+      <a:dk1>
+        <a:sysClr val="windowText" lastClr="000000"/>
+      </a:dk1>
+      <a:lt1>
+        <a:sysClr val="window" lastClr="FFFFFF"/>
+      </a:lt1>
+      <a:dk2>
+        <a:srgbClr val="44546A"/>
+      </a:dk2>
+      <a:lt2>
+        <a:srgbClr val="E7E6E6"/>
+      </a:lt2>
+      <a:accent1>
+        <a:srgbClr val="4472C4"/>
+      </a:accent1>
+      <a:accent2>
+        <a:srgbClr val="ED7D31"/>
+      </a:accent2>
+      <a:accent3>
+        <a:srgbClr val="A5A5A5"/>
+      </a:accent3>
+      <a:accent4>
+        <a:srgbClr val="FFC000"/>
+      </a:accent4>
+      <a:accent5>
+        <a:srgbClr val="5B9BD5"/>
+      </a:accent5>
+      <a:accent6>
+        <a:srgbClr val="70AD47"/>
+      </a:accent6>
+      <a:hlink>
+        <a:srgbClr val="0563C1"/>
+      </a:hlink>
+      <a:folHlink>
+        <a:srgbClr val="954F72"/>
+      </a:folHlink>
+    </a:clrScheme>
+    <a:fontScheme name="Office">
+      <a:majorFont>
+        <a:latin typeface="Calibri Light"/>
+        <a:ea typeface=""/>
+        <a:cs typeface=""/>
+      </a:majorFont>
+      <a:minorFont>
+        <a:latin typeface="Calibri"/>
+        <a:ea typeface=""/>
+        <a:cs typeface=""/>
+      </a:minorFont>
+    </a:fontScheme>
+    <a:fmtScheme name="Office">
+      <a:fillStyleLst>
+        <a:solidFill>
+          <a:schemeClr val="phClr"/>
+        </a:solidFill>
+        <a:solidFill>
+          <a:schemeClr val="phClr"/>
+        </a:solidFill>
+        <a:solidFill>
+          <a:schemeClr val="phClr"/>
+        </a:solidFill>
+      </a:fillStyleLst>
+      <a:lnStyleLst>
+        <a:ln w="6350" cap="flat">
+          <a:solidFill>
+            <a:schemeClr val="phClr"/>
+          </a:solidFill>
+        </a:ln>
+        <a:ln w="12700" cap="flat">
+          <a:solidFill>
+            <a:schemeClr val="phClr"/>
+          </a:solidFill>
+        </a:ln>
+        <a:ln w="19050" cap="flat">
+          <a:solidFill>
+            <a:schemeClr val="phClr"/>
+          </a:solidFill>
+        </a:ln>
+      </a:lnStyleLst>
+      <a:effectStyleLst>
+        <a:effectStyle>
+          <a:effectLst/>
+        </a:effectStyle>
+        <a:effectStyle>
+          <a:effectLst/>
+        </a:effectStyle>
+        <a:effectStyle>
+          <a:effectLst/>
+        </a:effectStyle>
+      </a:effectStyleLst>
+      <a:bgFillStyleLst>
+        <a:solidFill>
+          <a:schemeClr val="phClr"/>
+        </a:solidFill>
+        <a:solidFill>
+          <a:schemeClr val="phClr"/>
+        </a:solidFill>
+        <a:solidFill>
+          <a:schemeClr val="phClr"/>
+        </a:solidFill>
+      </a:bgFillStyleLst>
+    </a:fmtScheme>
+  </a:themeElements>
+  <a:extLst>
+    <a:ext uri="{05A4C25C-085E-4340-85A3-A5531E510DB2}">
+      <thm15:themeFamily xmlns:thm15="http://schemas.microsoft.com/office/thememl/2012/main" name="Office Theme" id="{62F939B6-93AF-4DB8-9C6B-D6C7DFDC589F}" vid="{4A3C46E8-61CC-4603-A589-7422A47A8E4A}"/>
+    </a:ext>
+  </a:extLst>
 </a:theme>
 </file>